--- a/AdaliVsSigmoid.pptx
+++ b/AdaliVsSigmoid.pptx
@@ -114,6 +114,11 @@
       </a:defRPr>
     </a:lvl9pPr>
   </p:defaultTextStyle>
+  <p:extLst>
+    <p:ext uri="{EFAFB233-063F-42B5-8137-9DF3F51BA10A}">
+      <p15:sldGuideLst xmlns:p15="http://schemas.microsoft.com/office/powerpoint/2012/main"/>
+    </p:ext>
+  </p:extLst>
 </p:presentation>
 </file>
 
@@ -302,7 +307,7 @@
           <a:p>
             <a:fld id="{5B8CA516-8B9E-4C40-9659-0ABF177D9B49}" type="datetimeFigureOut">
               <a:rPr lang="hr-HR" smtClean="0"/>
-              <a:t>16.5.2026.</a:t>
+              <a:t>21.5.2026.</a:t>
             </a:fld>
             <a:endParaRPr lang="hr-HR"/>
           </a:p>
@@ -600,7 +605,7 @@
           <a:p>
             <a:fld id="{5B8CA516-8B9E-4C40-9659-0ABF177D9B49}" type="datetimeFigureOut">
               <a:rPr lang="hr-HR" smtClean="0"/>
-              <a:t>16.5.2026.</a:t>
+              <a:t>21.5.2026.</a:t>
             </a:fld>
             <a:endParaRPr lang="hr-HR"/>
           </a:p>
@@ -792,7 +797,7 @@
           <a:p>
             <a:fld id="{5B8CA516-8B9E-4C40-9659-0ABF177D9B49}" type="datetimeFigureOut">
               <a:rPr lang="hr-HR" smtClean="0"/>
-              <a:t>16.5.2026.</a:t>
+              <a:t>21.5.2026.</a:t>
             </a:fld>
             <a:endParaRPr lang="hr-HR"/>
           </a:p>
@@ -1053,7 +1058,7 @@
           <a:p>
             <a:fld id="{5B8CA516-8B9E-4C40-9659-0ABF177D9B49}" type="datetimeFigureOut">
               <a:rPr lang="hr-HR" smtClean="0"/>
-              <a:t>16.5.2026.</a:t>
+              <a:t>21.5.2026.</a:t>
             </a:fld>
             <a:endParaRPr lang="hr-HR"/>
           </a:p>
@@ -1477,7 +1482,7 @@
           <a:p>
             <a:fld id="{5B8CA516-8B9E-4C40-9659-0ABF177D9B49}" type="datetimeFigureOut">
               <a:rPr lang="hr-HR" smtClean="0"/>
-              <a:t>16.5.2026.</a:t>
+              <a:t>21.5.2026.</a:t>
             </a:fld>
             <a:endParaRPr lang="hr-HR"/>
           </a:p>
@@ -2014,7 +2019,7 @@
           <a:p>
             <a:fld id="{5B8CA516-8B9E-4C40-9659-0ABF177D9B49}" type="datetimeFigureOut">
               <a:rPr lang="hr-HR" smtClean="0"/>
-              <a:t>16.5.2026.</a:t>
+              <a:t>21.5.2026.</a:t>
             </a:fld>
             <a:endParaRPr lang="hr-HR"/>
           </a:p>
@@ -2878,7 +2883,7 @@
           <a:p>
             <a:fld id="{5B8CA516-8B9E-4C40-9659-0ABF177D9B49}" type="datetimeFigureOut">
               <a:rPr lang="hr-HR" smtClean="0"/>
-              <a:t>16.5.2026.</a:t>
+              <a:t>21.5.2026.</a:t>
             </a:fld>
             <a:endParaRPr lang="hr-HR"/>
           </a:p>
@@ -3048,7 +3053,7 @@
           <a:p>
             <a:fld id="{5B8CA516-8B9E-4C40-9659-0ABF177D9B49}" type="datetimeFigureOut">
               <a:rPr lang="hr-HR" smtClean="0"/>
-              <a:t>16.5.2026.</a:t>
+              <a:t>21.5.2026.</a:t>
             </a:fld>
             <a:endParaRPr lang="hr-HR"/>
           </a:p>
@@ -3232,7 +3237,7 @@
           <a:p>
             <a:fld id="{5B8CA516-8B9E-4C40-9659-0ABF177D9B49}" type="datetimeFigureOut">
               <a:rPr lang="hr-HR" smtClean="0"/>
-              <a:t>16.5.2026.</a:t>
+              <a:t>21.5.2026.</a:t>
             </a:fld>
             <a:endParaRPr lang="hr-HR"/>
           </a:p>
@@ -3402,7 +3407,7 @@
           <a:p>
             <a:fld id="{5B8CA516-8B9E-4C40-9659-0ABF177D9B49}" type="datetimeFigureOut">
               <a:rPr lang="hr-HR" smtClean="0"/>
-              <a:t>16.5.2026.</a:t>
+              <a:t>21.5.2026.</a:t>
             </a:fld>
             <a:endParaRPr lang="hr-HR"/>
           </a:p>
@@ -3646,7 +3651,7 @@
           <a:p>
             <a:fld id="{5B8CA516-8B9E-4C40-9659-0ABF177D9B49}" type="datetimeFigureOut">
               <a:rPr lang="hr-HR" smtClean="0"/>
-              <a:t>16.5.2026.</a:t>
+              <a:t>21.5.2026.</a:t>
             </a:fld>
             <a:endParaRPr lang="hr-HR"/>
           </a:p>
@@ -3882,7 +3887,7 @@
           <a:p>
             <a:fld id="{5B8CA516-8B9E-4C40-9659-0ABF177D9B49}" type="datetimeFigureOut">
               <a:rPr lang="hr-HR" smtClean="0"/>
-              <a:t>16.5.2026.</a:t>
+              <a:t>21.5.2026.</a:t>
             </a:fld>
             <a:endParaRPr lang="hr-HR"/>
           </a:p>
@@ -4348,7 +4353,7 @@
           <a:p>
             <a:fld id="{5B8CA516-8B9E-4C40-9659-0ABF177D9B49}" type="datetimeFigureOut">
               <a:rPr lang="hr-HR" smtClean="0"/>
-              <a:t>16.5.2026.</a:t>
+              <a:t>21.5.2026.</a:t>
             </a:fld>
             <a:endParaRPr lang="hr-HR"/>
           </a:p>
@@ -4466,7 +4471,7 @@
           <a:p>
             <a:fld id="{5B8CA516-8B9E-4C40-9659-0ABF177D9B49}" type="datetimeFigureOut">
               <a:rPr lang="hr-HR" smtClean="0"/>
-              <a:t>16.5.2026.</a:t>
+              <a:t>21.5.2026.</a:t>
             </a:fld>
             <a:endParaRPr lang="hr-HR"/>
           </a:p>
@@ -4561,7 +4566,7 @@
           <a:p>
             <a:fld id="{5B8CA516-8B9E-4C40-9659-0ABF177D9B49}" type="datetimeFigureOut">
               <a:rPr lang="hr-HR" smtClean="0"/>
-              <a:t>16.5.2026.</a:t>
+              <a:t>21.5.2026.</a:t>
             </a:fld>
             <a:endParaRPr lang="hr-HR"/>
           </a:p>
@@ -4816,7 +4821,7 @@
           <a:p>
             <a:fld id="{5B8CA516-8B9E-4C40-9659-0ABF177D9B49}" type="datetimeFigureOut">
               <a:rPr lang="hr-HR" smtClean="0"/>
-              <a:t>16.5.2026.</a:t>
+              <a:t>21.5.2026.</a:t>
             </a:fld>
             <a:endParaRPr lang="hr-HR"/>
           </a:p>
@@ -5116,7 +5121,7 @@
           <a:p>
             <a:fld id="{5B8CA516-8B9E-4C40-9659-0ABF177D9B49}" type="datetimeFigureOut">
               <a:rPr lang="hr-HR" smtClean="0"/>
-              <a:t>16.5.2026.</a:t>
+              <a:t>21.5.2026.</a:t>
             </a:fld>
             <a:endParaRPr lang="hr-HR"/>
           </a:p>
@@ -5350,7 +5355,7 @@
           <a:p>
             <a:fld id="{5B8CA516-8B9E-4C40-9659-0ABF177D9B49}" type="datetimeFigureOut">
               <a:rPr lang="hr-HR" smtClean="0"/>
-              <a:t>16.5.2026.</a:t>
+              <a:t>21.5.2026.</a:t>
             </a:fld>
             <a:endParaRPr lang="hr-HR"/>
           </a:p>
@@ -8316,7 +8321,7 @@
                   <a:schemeClr val="tx1"/>
                 </a:solidFill>
               </a:rPr>
-              <a:t> postiže bolje rezultate na većini eksperimenata</a:t>
+              <a:t> postiže bolje rezultate na svim eksperimentima</a:t>
             </a:r>
           </a:p>
           <a:p>
@@ -8380,7 +8385,7 @@
                   <a:schemeClr val="tx1"/>
                 </a:solidFill>
               </a:rPr>
-              <a:t>PyTorch</a:t>
+              <a:t>PyTorcha</a:t>
             </a:r>
             <a:r>
               <a:rPr lang="hr-HR" sz="2000" dirty="0">
@@ -8388,7 +8393,7 @@
                   <a:schemeClr val="tx1"/>
                 </a:solidFill>
               </a:rPr>
-              <a:t>/CUDA okruženja i NVIDIA drivera</a:t>
+              <a:t> i NVIDIA drivera</a:t>
             </a:r>
           </a:p>
         </p:txBody>

--- a/AdaliVsSigmoid.pptx
+++ b/AdaliVsSigmoid.pptx
@@ -307,7 +307,7 @@
           <a:p>
             <a:fld id="{5B8CA516-8B9E-4C40-9659-0ABF177D9B49}" type="datetimeFigureOut">
               <a:rPr lang="hr-HR" smtClean="0"/>
-              <a:t>21.5.2026.</a:t>
+              <a:t>27.5.2026.</a:t>
             </a:fld>
             <a:endParaRPr lang="hr-HR"/>
           </a:p>
@@ -605,7 +605,7 @@
           <a:p>
             <a:fld id="{5B8CA516-8B9E-4C40-9659-0ABF177D9B49}" type="datetimeFigureOut">
               <a:rPr lang="hr-HR" smtClean="0"/>
-              <a:t>21.5.2026.</a:t>
+              <a:t>27.5.2026.</a:t>
             </a:fld>
             <a:endParaRPr lang="hr-HR"/>
           </a:p>
@@ -797,7 +797,7 @@
           <a:p>
             <a:fld id="{5B8CA516-8B9E-4C40-9659-0ABF177D9B49}" type="datetimeFigureOut">
               <a:rPr lang="hr-HR" smtClean="0"/>
-              <a:t>21.5.2026.</a:t>
+              <a:t>27.5.2026.</a:t>
             </a:fld>
             <a:endParaRPr lang="hr-HR"/>
           </a:p>
@@ -1058,7 +1058,7 @@
           <a:p>
             <a:fld id="{5B8CA516-8B9E-4C40-9659-0ABF177D9B49}" type="datetimeFigureOut">
               <a:rPr lang="hr-HR" smtClean="0"/>
-              <a:t>21.5.2026.</a:t>
+              <a:t>27.5.2026.</a:t>
             </a:fld>
             <a:endParaRPr lang="hr-HR"/>
           </a:p>
@@ -1482,7 +1482,7 @@
           <a:p>
             <a:fld id="{5B8CA516-8B9E-4C40-9659-0ABF177D9B49}" type="datetimeFigureOut">
               <a:rPr lang="hr-HR" smtClean="0"/>
-              <a:t>21.5.2026.</a:t>
+              <a:t>27.5.2026.</a:t>
             </a:fld>
             <a:endParaRPr lang="hr-HR"/>
           </a:p>
@@ -2019,7 +2019,7 @@
           <a:p>
             <a:fld id="{5B8CA516-8B9E-4C40-9659-0ABF177D9B49}" type="datetimeFigureOut">
               <a:rPr lang="hr-HR" smtClean="0"/>
-              <a:t>21.5.2026.</a:t>
+              <a:t>27.5.2026.</a:t>
             </a:fld>
             <a:endParaRPr lang="hr-HR"/>
           </a:p>
@@ -2883,7 +2883,7 @@
           <a:p>
             <a:fld id="{5B8CA516-8B9E-4C40-9659-0ABF177D9B49}" type="datetimeFigureOut">
               <a:rPr lang="hr-HR" smtClean="0"/>
-              <a:t>21.5.2026.</a:t>
+              <a:t>27.5.2026.</a:t>
             </a:fld>
             <a:endParaRPr lang="hr-HR"/>
           </a:p>
@@ -3053,7 +3053,7 @@
           <a:p>
             <a:fld id="{5B8CA516-8B9E-4C40-9659-0ABF177D9B49}" type="datetimeFigureOut">
               <a:rPr lang="hr-HR" smtClean="0"/>
-              <a:t>21.5.2026.</a:t>
+              <a:t>27.5.2026.</a:t>
             </a:fld>
             <a:endParaRPr lang="hr-HR"/>
           </a:p>
@@ -3237,7 +3237,7 @@
           <a:p>
             <a:fld id="{5B8CA516-8B9E-4C40-9659-0ABF177D9B49}" type="datetimeFigureOut">
               <a:rPr lang="hr-HR" smtClean="0"/>
-              <a:t>21.5.2026.</a:t>
+              <a:t>27.5.2026.</a:t>
             </a:fld>
             <a:endParaRPr lang="hr-HR"/>
           </a:p>
@@ -3407,7 +3407,7 @@
           <a:p>
             <a:fld id="{5B8CA516-8B9E-4C40-9659-0ABF177D9B49}" type="datetimeFigureOut">
               <a:rPr lang="hr-HR" smtClean="0"/>
-              <a:t>21.5.2026.</a:t>
+              <a:t>27.5.2026.</a:t>
             </a:fld>
             <a:endParaRPr lang="hr-HR"/>
           </a:p>
@@ -3651,7 +3651,7 @@
           <a:p>
             <a:fld id="{5B8CA516-8B9E-4C40-9659-0ABF177D9B49}" type="datetimeFigureOut">
               <a:rPr lang="hr-HR" smtClean="0"/>
-              <a:t>21.5.2026.</a:t>
+              <a:t>27.5.2026.</a:t>
             </a:fld>
             <a:endParaRPr lang="hr-HR"/>
           </a:p>
@@ -3887,7 +3887,7 @@
           <a:p>
             <a:fld id="{5B8CA516-8B9E-4C40-9659-0ABF177D9B49}" type="datetimeFigureOut">
               <a:rPr lang="hr-HR" smtClean="0"/>
-              <a:t>21.5.2026.</a:t>
+              <a:t>27.5.2026.</a:t>
             </a:fld>
             <a:endParaRPr lang="hr-HR"/>
           </a:p>
@@ -4353,7 +4353,7 @@
           <a:p>
             <a:fld id="{5B8CA516-8B9E-4C40-9659-0ABF177D9B49}" type="datetimeFigureOut">
               <a:rPr lang="hr-HR" smtClean="0"/>
-              <a:t>21.5.2026.</a:t>
+              <a:t>27.5.2026.</a:t>
             </a:fld>
             <a:endParaRPr lang="hr-HR"/>
           </a:p>
@@ -4471,7 +4471,7 @@
           <a:p>
             <a:fld id="{5B8CA516-8B9E-4C40-9659-0ABF177D9B49}" type="datetimeFigureOut">
               <a:rPr lang="hr-HR" smtClean="0"/>
-              <a:t>21.5.2026.</a:t>
+              <a:t>27.5.2026.</a:t>
             </a:fld>
             <a:endParaRPr lang="hr-HR"/>
           </a:p>
@@ -4566,7 +4566,7 @@
           <a:p>
             <a:fld id="{5B8CA516-8B9E-4C40-9659-0ABF177D9B49}" type="datetimeFigureOut">
               <a:rPr lang="hr-HR" smtClean="0"/>
-              <a:t>21.5.2026.</a:t>
+              <a:t>27.5.2026.</a:t>
             </a:fld>
             <a:endParaRPr lang="hr-HR"/>
           </a:p>
@@ -4821,7 +4821,7 @@
           <a:p>
             <a:fld id="{5B8CA516-8B9E-4C40-9659-0ABF177D9B49}" type="datetimeFigureOut">
               <a:rPr lang="hr-HR" smtClean="0"/>
-              <a:t>21.5.2026.</a:t>
+              <a:t>27.5.2026.</a:t>
             </a:fld>
             <a:endParaRPr lang="hr-HR"/>
           </a:p>
@@ -5121,7 +5121,7 @@
           <a:p>
             <a:fld id="{5B8CA516-8B9E-4C40-9659-0ABF177D9B49}" type="datetimeFigureOut">
               <a:rPr lang="hr-HR" smtClean="0"/>
-              <a:t>21.5.2026.</a:t>
+              <a:t>27.5.2026.</a:t>
             </a:fld>
             <a:endParaRPr lang="hr-HR"/>
           </a:p>
@@ -5355,7 +5355,7 @@
           <a:p>
             <a:fld id="{5B8CA516-8B9E-4C40-9659-0ABF177D9B49}" type="datetimeFigureOut">
               <a:rPr lang="hr-HR" smtClean="0"/>
-              <a:t>21.5.2026.</a:t>
+              <a:t>27.5.2026.</a:t>
             </a:fld>
             <a:endParaRPr lang="hr-HR"/>
           </a:p>
@@ -6582,7 +6582,7 @@
                   <a:schemeClr val="tx1"/>
                 </a:solidFill>
               </a:rPr>
-              <a:t>AdaLi metoda pokazuje stabilnije učenje i bolje rezultate na većini eksperimenata</a:t>
+              <a:t>AdaLi metoda pokazuje stabilnije učenje i bolje rezultate na eksperimentima</a:t>
             </a:r>
           </a:p>
           <a:p>
@@ -7552,7 +7552,7 @@
         </p:blipFill>
         <p:spPr>
           <a:xfrm>
-            <a:off x="7588577" y="1580050"/>
+            <a:off x="7532016" y="1580050"/>
             <a:ext cx="4379177" cy="4903787"/>
           </a:xfrm>
         </p:spPr>

--- a/AdaliVsSigmoid.pptx
+++ b/AdaliVsSigmoid.pptx
@@ -12,10 +12,13 @@
     <p:sldId id="260" r:id="rId6"/>
     <p:sldId id="261" r:id="rId7"/>
     <p:sldId id="262" r:id="rId8"/>
-    <p:sldId id="263" r:id="rId9"/>
-    <p:sldId id="264" r:id="rId10"/>
-    <p:sldId id="265" r:id="rId11"/>
-    <p:sldId id="266" r:id="rId12"/>
+    <p:sldId id="267" r:id="rId9"/>
+    <p:sldId id="263" r:id="rId10"/>
+    <p:sldId id="264" r:id="rId11"/>
+    <p:sldId id="268" r:id="rId12"/>
+    <p:sldId id="266" r:id="rId13"/>
+    <p:sldId id="265" r:id="rId14"/>
+    <p:sldId id="269" r:id="rId15"/>
   </p:sldIdLst>
   <p:sldSz cx="12192000" cy="6858000"/>
   <p:notesSz cx="6858000" cy="9144000"/>
@@ -307,7 +310,7 @@
           <a:p>
             <a:fld id="{5B8CA516-8B9E-4C40-9659-0ABF177D9B49}" type="datetimeFigureOut">
               <a:rPr lang="hr-HR" smtClean="0"/>
-              <a:t>27.5.2026.</a:t>
+              <a:t>30.6.2026.</a:t>
             </a:fld>
             <a:endParaRPr lang="hr-HR"/>
           </a:p>
@@ -605,7 +608,7 @@
           <a:p>
             <a:fld id="{5B8CA516-8B9E-4C40-9659-0ABF177D9B49}" type="datetimeFigureOut">
               <a:rPr lang="hr-HR" smtClean="0"/>
-              <a:t>27.5.2026.</a:t>
+              <a:t>30.6.2026.</a:t>
             </a:fld>
             <a:endParaRPr lang="hr-HR"/>
           </a:p>
@@ -797,7 +800,7 @@
           <a:p>
             <a:fld id="{5B8CA516-8B9E-4C40-9659-0ABF177D9B49}" type="datetimeFigureOut">
               <a:rPr lang="hr-HR" smtClean="0"/>
-              <a:t>27.5.2026.</a:t>
+              <a:t>30.6.2026.</a:t>
             </a:fld>
             <a:endParaRPr lang="hr-HR"/>
           </a:p>
@@ -1058,7 +1061,7 @@
           <a:p>
             <a:fld id="{5B8CA516-8B9E-4C40-9659-0ABF177D9B49}" type="datetimeFigureOut">
               <a:rPr lang="hr-HR" smtClean="0"/>
-              <a:t>27.5.2026.</a:t>
+              <a:t>30.6.2026.</a:t>
             </a:fld>
             <a:endParaRPr lang="hr-HR"/>
           </a:p>
@@ -1482,7 +1485,7 @@
           <a:p>
             <a:fld id="{5B8CA516-8B9E-4C40-9659-0ABF177D9B49}" type="datetimeFigureOut">
               <a:rPr lang="hr-HR" smtClean="0"/>
-              <a:t>27.5.2026.</a:t>
+              <a:t>30.6.2026.</a:t>
             </a:fld>
             <a:endParaRPr lang="hr-HR"/>
           </a:p>
@@ -2019,7 +2022,7 @@
           <a:p>
             <a:fld id="{5B8CA516-8B9E-4C40-9659-0ABF177D9B49}" type="datetimeFigureOut">
               <a:rPr lang="hr-HR" smtClean="0"/>
-              <a:t>27.5.2026.</a:t>
+              <a:t>30.6.2026.</a:t>
             </a:fld>
             <a:endParaRPr lang="hr-HR"/>
           </a:p>
@@ -2883,7 +2886,7 @@
           <a:p>
             <a:fld id="{5B8CA516-8B9E-4C40-9659-0ABF177D9B49}" type="datetimeFigureOut">
               <a:rPr lang="hr-HR" smtClean="0"/>
-              <a:t>27.5.2026.</a:t>
+              <a:t>30.6.2026.</a:t>
             </a:fld>
             <a:endParaRPr lang="hr-HR"/>
           </a:p>
@@ -3053,7 +3056,7 @@
           <a:p>
             <a:fld id="{5B8CA516-8B9E-4C40-9659-0ABF177D9B49}" type="datetimeFigureOut">
               <a:rPr lang="hr-HR" smtClean="0"/>
-              <a:t>27.5.2026.</a:t>
+              <a:t>30.6.2026.</a:t>
             </a:fld>
             <a:endParaRPr lang="hr-HR"/>
           </a:p>
@@ -3237,7 +3240,7 @@
           <a:p>
             <a:fld id="{5B8CA516-8B9E-4C40-9659-0ABF177D9B49}" type="datetimeFigureOut">
               <a:rPr lang="hr-HR" smtClean="0"/>
-              <a:t>27.5.2026.</a:t>
+              <a:t>30.6.2026.</a:t>
             </a:fld>
             <a:endParaRPr lang="hr-HR"/>
           </a:p>
@@ -3407,7 +3410,7 @@
           <a:p>
             <a:fld id="{5B8CA516-8B9E-4C40-9659-0ABF177D9B49}" type="datetimeFigureOut">
               <a:rPr lang="hr-HR" smtClean="0"/>
-              <a:t>27.5.2026.</a:t>
+              <a:t>30.6.2026.</a:t>
             </a:fld>
             <a:endParaRPr lang="hr-HR"/>
           </a:p>
@@ -3651,7 +3654,7 @@
           <a:p>
             <a:fld id="{5B8CA516-8B9E-4C40-9659-0ABF177D9B49}" type="datetimeFigureOut">
               <a:rPr lang="hr-HR" smtClean="0"/>
-              <a:t>27.5.2026.</a:t>
+              <a:t>30.6.2026.</a:t>
             </a:fld>
             <a:endParaRPr lang="hr-HR"/>
           </a:p>
@@ -3887,7 +3890,7 @@
           <a:p>
             <a:fld id="{5B8CA516-8B9E-4C40-9659-0ABF177D9B49}" type="datetimeFigureOut">
               <a:rPr lang="hr-HR" smtClean="0"/>
-              <a:t>27.5.2026.</a:t>
+              <a:t>30.6.2026.</a:t>
             </a:fld>
             <a:endParaRPr lang="hr-HR"/>
           </a:p>
@@ -4353,7 +4356,7 @@
           <a:p>
             <a:fld id="{5B8CA516-8B9E-4C40-9659-0ABF177D9B49}" type="datetimeFigureOut">
               <a:rPr lang="hr-HR" smtClean="0"/>
-              <a:t>27.5.2026.</a:t>
+              <a:t>30.6.2026.</a:t>
             </a:fld>
             <a:endParaRPr lang="hr-HR"/>
           </a:p>
@@ -4471,7 +4474,7 @@
           <a:p>
             <a:fld id="{5B8CA516-8B9E-4C40-9659-0ABF177D9B49}" type="datetimeFigureOut">
               <a:rPr lang="hr-HR" smtClean="0"/>
-              <a:t>27.5.2026.</a:t>
+              <a:t>30.6.2026.</a:t>
             </a:fld>
             <a:endParaRPr lang="hr-HR"/>
           </a:p>
@@ -4566,7 +4569,7 @@
           <a:p>
             <a:fld id="{5B8CA516-8B9E-4C40-9659-0ABF177D9B49}" type="datetimeFigureOut">
               <a:rPr lang="hr-HR" smtClean="0"/>
-              <a:t>27.5.2026.</a:t>
+              <a:t>30.6.2026.</a:t>
             </a:fld>
             <a:endParaRPr lang="hr-HR"/>
           </a:p>
@@ -4821,7 +4824,7 @@
           <a:p>
             <a:fld id="{5B8CA516-8B9E-4C40-9659-0ABF177D9B49}" type="datetimeFigureOut">
               <a:rPr lang="hr-HR" smtClean="0"/>
-              <a:t>27.5.2026.</a:t>
+              <a:t>30.6.2026.</a:t>
             </a:fld>
             <a:endParaRPr lang="hr-HR"/>
           </a:p>
@@ -5121,7 +5124,7 @@
           <a:p>
             <a:fld id="{5B8CA516-8B9E-4C40-9659-0ABF177D9B49}" type="datetimeFigureOut">
               <a:rPr lang="hr-HR" smtClean="0"/>
-              <a:t>27.5.2026.</a:t>
+              <a:t>30.6.2026.</a:t>
             </a:fld>
             <a:endParaRPr lang="hr-HR"/>
           </a:p>
@@ -5355,7 +5358,7 @@
           <a:p>
             <a:fld id="{5B8CA516-8B9E-4C40-9659-0ABF177D9B49}" type="datetimeFigureOut">
               <a:rPr lang="hr-HR" smtClean="0"/>
-              <a:t>27.5.2026.</a:t>
+              <a:t>30.6.2026.</a:t>
             </a:fld>
             <a:endParaRPr lang="hr-HR"/>
           </a:p>
@@ -6205,7 +6208,7 @@
           <p:cNvPr id="2" name="Naslov 1">
             <a:extLst>
               <a:ext uri="{FF2B5EF4-FFF2-40B4-BE49-F238E27FC236}">
-                <a16:creationId xmlns:a16="http://schemas.microsoft.com/office/drawing/2014/main" id="{D9836082-D048-4E9F-9628-68FE17B04A30}"/>
+                <a16:creationId xmlns:a16="http://schemas.microsoft.com/office/drawing/2014/main" id="{A9CB856E-9D5B-4331-84FF-31D392F1D83D}"/>
               </a:ext>
             </a:extLst>
           </p:cNvPr>
@@ -6221,212 +6224,49 @@
           <a:bodyPr/>
           <a:lstStyle/>
           <a:p>
-            <a:r>
-              <a:rPr lang="hr-HR" dirty="0">
-                <a:solidFill>
-                  <a:schemeClr val="tx1"/>
-                </a:solidFill>
-              </a:rPr>
-              <a:t>Daljnji plan rada</a:t>
-            </a:r>
-          </a:p>
-        </p:txBody>
-      </p:sp>
-      <p:sp>
-        <p:nvSpPr>
-          <p:cNvPr id="3" name="Rezervirano mjesto sadržaja 2">
+            <a:endParaRPr lang="hr-HR"/>
+          </a:p>
+        </p:txBody>
+      </p:sp>
+      <p:pic>
+        <p:nvPicPr>
+          <p:cNvPr id="7" name="Rezervirano mjesto sadržaja 6">
             <a:extLst>
               <a:ext uri="{FF2B5EF4-FFF2-40B4-BE49-F238E27FC236}">
-                <a16:creationId xmlns:a16="http://schemas.microsoft.com/office/drawing/2014/main" id="{70536C48-932C-46E7-80B8-714272667158}"/>
+                <a16:creationId xmlns:a16="http://schemas.microsoft.com/office/drawing/2014/main" id="{B77A89DA-E41D-4C86-BB9C-5A02E6D54DCE}"/>
               </a:ext>
             </a:extLst>
           </p:cNvPr>
-          <p:cNvSpPr>
-            <a:spLocks noGrp="1"/>
-          </p:cNvSpPr>
+          <p:cNvPicPr>
+            <a:picLocks noGrp="1" noChangeAspect="1"/>
+          </p:cNvPicPr>
           <p:nvPr>
             <p:ph idx="1"/>
           </p:nvPr>
-        </p:nvSpPr>
-        <p:spPr/>
-        <p:txBody>
-          <a:bodyPr/>
-          <a:lstStyle/>
-          <a:p>
-            <a:r>
-              <a:rPr lang="hr-HR" sz="2400" dirty="0">
-                <a:solidFill>
-                  <a:schemeClr val="tx1"/>
-                </a:solidFill>
-              </a:rPr>
-              <a:t>Analizirati </a:t>
-            </a:r>
-            <a:r>
-              <a:rPr lang="hr-HR" sz="2400" dirty="0" err="1">
-                <a:solidFill>
-                  <a:schemeClr val="tx1"/>
-                </a:solidFill>
-              </a:rPr>
-              <a:t>spike</a:t>
-            </a:r>
-            <a:r>
-              <a:rPr lang="hr-HR" sz="2400" dirty="0">
-                <a:solidFill>
-                  <a:schemeClr val="tx1"/>
-                </a:solidFill>
-              </a:rPr>
-              <a:t> aktivnost</a:t>
-            </a:r>
-          </a:p>
-          <a:p>
-            <a:r>
-              <a:rPr lang="it-IT" sz="2400" dirty="0" err="1">
-                <a:solidFill>
-                  <a:schemeClr val="tx1"/>
-                </a:solidFill>
-              </a:rPr>
-              <a:t>Evaluirati</a:t>
-            </a:r>
-            <a:r>
-              <a:rPr lang="it-IT" sz="2400" dirty="0">
-                <a:solidFill>
-                  <a:schemeClr val="tx1"/>
-                </a:solidFill>
-              </a:rPr>
-              <a:t> </a:t>
-            </a:r>
-            <a:r>
-              <a:rPr lang="it-IT" sz="2400" dirty="0" err="1">
-                <a:solidFill>
-                  <a:schemeClr val="tx1"/>
-                </a:solidFill>
-              </a:rPr>
-              <a:t>modele</a:t>
-            </a:r>
-            <a:r>
-              <a:rPr lang="it-IT" sz="2400" dirty="0">
-                <a:solidFill>
-                  <a:schemeClr val="tx1"/>
-                </a:solidFill>
-              </a:rPr>
-              <a:t> </a:t>
-            </a:r>
-            <a:r>
-              <a:rPr lang="it-IT" sz="2400" dirty="0" err="1">
-                <a:solidFill>
-                  <a:schemeClr val="tx1"/>
-                </a:solidFill>
-              </a:rPr>
-              <a:t>na</a:t>
-            </a:r>
-            <a:r>
-              <a:rPr lang="it-IT" sz="2400" dirty="0">
-                <a:solidFill>
-                  <a:schemeClr val="tx1"/>
-                </a:solidFill>
-              </a:rPr>
-              <a:t> </a:t>
-            </a:r>
-            <a:r>
-              <a:rPr lang="it-IT" sz="2400" dirty="0" err="1">
-                <a:solidFill>
-                  <a:schemeClr val="tx1"/>
-                </a:solidFill>
-              </a:rPr>
-              <a:t>neuromorphic</a:t>
-            </a:r>
-            <a:r>
-              <a:rPr lang="it-IT" sz="2400" dirty="0">
-                <a:solidFill>
-                  <a:schemeClr val="tx1"/>
-                </a:solidFill>
-              </a:rPr>
-              <a:t> </a:t>
-            </a:r>
-            <a:r>
-              <a:rPr lang="it-IT" sz="2400" dirty="0" err="1">
-                <a:solidFill>
-                  <a:schemeClr val="tx1"/>
-                </a:solidFill>
-              </a:rPr>
-              <a:t>datasetima</a:t>
-            </a:r>
-            <a:endParaRPr lang="hr-HR" sz="2400" dirty="0">
-              <a:solidFill>
-                <a:schemeClr val="tx1"/>
-              </a:solidFill>
-            </a:endParaRPr>
-          </a:p>
-          <a:p>
-            <a:r>
-              <a:rPr lang="hr-HR" sz="2400" dirty="0">
-                <a:solidFill>
-                  <a:schemeClr val="tx1"/>
-                </a:solidFill>
-              </a:rPr>
-              <a:t>Analizirati ponašanje </a:t>
-            </a:r>
-            <a:r>
-              <a:rPr lang="hr-HR" sz="2400" dirty="0" err="1">
-                <a:solidFill>
-                  <a:schemeClr val="tx1"/>
-                </a:solidFill>
-              </a:rPr>
-              <a:t>adaptive</a:t>
-            </a:r>
-            <a:r>
-              <a:rPr lang="hr-HR" sz="2400" dirty="0">
-                <a:solidFill>
-                  <a:schemeClr val="tx1"/>
-                </a:solidFill>
-              </a:rPr>
-              <a:t> </a:t>
-            </a:r>
-            <a:r>
-              <a:rPr lang="hr-HR" sz="2400" dirty="0" err="1">
-                <a:solidFill>
-                  <a:schemeClr val="tx1"/>
-                </a:solidFill>
-              </a:rPr>
-              <a:t>surrogate</a:t>
-            </a:r>
-            <a:r>
-              <a:rPr lang="hr-HR" sz="2400" dirty="0">
-                <a:solidFill>
-                  <a:schemeClr val="tx1"/>
-                </a:solidFill>
-              </a:rPr>
-              <a:t> metoda na event-</a:t>
-            </a:r>
-            <a:r>
-              <a:rPr lang="hr-HR" sz="2400" dirty="0" err="1">
-                <a:solidFill>
-                  <a:schemeClr val="tx1"/>
-                </a:solidFill>
-              </a:rPr>
-              <a:t>based</a:t>
-            </a:r>
-            <a:r>
-              <a:rPr lang="hr-HR" sz="2400" dirty="0">
-                <a:solidFill>
-                  <a:schemeClr val="tx1"/>
-                </a:solidFill>
-              </a:rPr>
-              <a:t> podacima</a:t>
-            </a:r>
-          </a:p>
-          <a:p>
-            <a:pPr marL="36900" indent="0">
-              <a:buNone/>
-            </a:pPr>
-            <a:endParaRPr lang="hr-HR" dirty="0"/>
-          </a:p>
-        </p:txBody>
-      </p:sp>
+        </p:nvPicPr>
+        <p:blipFill>
+          <a:blip r:embed="rId2">
+            <a:extLst>
+              <a:ext uri="{28A0092B-C50C-407E-A947-70E740481C1C}">
+                <a14:useLocalDpi xmlns:a14="http://schemas.microsoft.com/office/drawing/2010/main" val="0"/>
+              </a:ext>
+            </a:extLst>
+          </a:blip>
+          <a:stretch>
+            <a:fillRect/>
+          </a:stretch>
+        </p:blipFill>
+        <p:spPr>
+          <a:xfrm>
+            <a:off x="842507" y="1081725"/>
+            <a:ext cx="10506986" cy="4694549"/>
+          </a:xfrm>
+        </p:spPr>
+      </p:pic>
     </p:spTree>
     <p:extLst>
       <p:ext uri="{BB962C8B-B14F-4D97-AF65-F5344CB8AC3E}">
-        <p14:creationId xmlns:p14="http://schemas.microsoft.com/office/powerpoint/2010/main" val="2762488501"/>
+        <p14:creationId xmlns:p14="http://schemas.microsoft.com/office/powerpoint/2010/main" val="4189312054"/>
       </p:ext>
     </p:extLst>
   </p:cSld>
@@ -6458,6 +6298,96 @@
           <p:cNvPr id="2" name="Naslov 1">
             <a:extLst>
               <a:ext uri="{FF2B5EF4-FFF2-40B4-BE49-F238E27FC236}">
+                <a16:creationId xmlns:a16="http://schemas.microsoft.com/office/drawing/2014/main" id="{0CC9ED6C-BF7F-4F1E-9C8D-9C4C8B221D69}"/>
+              </a:ext>
+            </a:extLst>
+          </p:cNvPr>
+          <p:cNvSpPr>
+            <a:spLocks noGrp="1"/>
+          </p:cNvSpPr>
+          <p:nvPr>
+            <p:ph type="title"/>
+          </p:nvPr>
+        </p:nvSpPr>
+        <p:spPr/>
+        <p:txBody>
+          <a:bodyPr/>
+          <a:lstStyle/>
+          <a:p>
+            <a:endParaRPr lang="hr-HR"/>
+          </a:p>
+        </p:txBody>
+      </p:sp>
+      <p:pic>
+        <p:nvPicPr>
+          <p:cNvPr id="5" name="Rezervirano mjesto sadržaja 4">
+            <a:extLst>
+              <a:ext uri="{FF2B5EF4-FFF2-40B4-BE49-F238E27FC236}">
+                <a16:creationId xmlns:a16="http://schemas.microsoft.com/office/drawing/2014/main" id="{63339AEC-F5E1-4F7D-85DA-C8FD77C4CF72}"/>
+              </a:ext>
+            </a:extLst>
+          </p:cNvPr>
+          <p:cNvPicPr>
+            <a:picLocks noGrp="1" noChangeAspect="1"/>
+          </p:cNvPicPr>
+          <p:nvPr>
+            <p:ph idx="1"/>
+          </p:nvPr>
+        </p:nvPicPr>
+        <p:blipFill>
+          <a:blip r:embed="rId2">
+            <a:extLst>
+              <a:ext uri="{28A0092B-C50C-407E-A947-70E740481C1C}">
+                <a14:useLocalDpi xmlns:a14="http://schemas.microsoft.com/office/drawing/2010/main" val="0"/>
+              </a:ext>
+            </a:extLst>
+          </a:blip>
+          <a:stretch>
+            <a:fillRect/>
+          </a:stretch>
+        </p:blipFill>
+        <p:spPr>
+          <a:xfrm>
+            <a:off x="603316" y="1094052"/>
+            <a:ext cx="10793690" cy="4669896"/>
+          </a:xfrm>
+        </p:spPr>
+      </p:pic>
+    </p:spTree>
+    <p:extLst>
+      <p:ext uri="{BB962C8B-B14F-4D97-AF65-F5344CB8AC3E}">
+        <p14:creationId xmlns:p14="http://schemas.microsoft.com/office/powerpoint/2010/main" val="2536649691"/>
+      </p:ext>
+    </p:extLst>
+  </p:cSld>
+  <p:clrMapOvr>
+    <a:masterClrMapping/>
+  </p:clrMapOvr>
+</p:sld>
+</file>
+
+<file path=ppt/slides/slide12.xml><?xml version="1.0" encoding="utf-8"?>
+<p:sld xmlns:a="http://schemas.openxmlformats.org/drawingml/2006/main" xmlns:r="http://schemas.openxmlformats.org/officeDocument/2006/relationships" xmlns:p="http://schemas.openxmlformats.org/presentationml/2006/main">
+  <p:cSld>
+    <p:spTree>
+      <p:nvGrpSpPr>
+        <p:cNvPr id="1" name=""/>
+        <p:cNvGrpSpPr/>
+        <p:nvPr/>
+      </p:nvGrpSpPr>
+      <p:grpSpPr>
+        <a:xfrm>
+          <a:off x="0" y="0"/>
+          <a:ext cx="0" cy="0"/>
+          <a:chOff x="0" y="0"/>
+          <a:chExt cx="0" cy="0"/>
+        </a:xfrm>
+      </p:grpSpPr>
+      <p:sp>
+        <p:nvSpPr>
+          <p:cNvPr id="2" name="Naslov 1">
+            <a:extLst>
+              <a:ext uri="{FF2B5EF4-FFF2-40B4-BE49-F238E27FC236}">
                 <a16:creationId xmlns:a16="http://schemas.microsoft.com/office/drawing/2014/main" id="{8375C444-CF06-48E1-83D4-A25E434F7D1F}"/>
               </a:ext>
             </a:extLst>
@@ -6475,7 +6405,11 @@
           <a:lstStyle/>
           <a:p>
             <a:r>
-              <a:rPr lang="hr-HR" dirty="0"/>
+              <a:rPr lang="hr-HR" dirty="0">
+                <a:solidFill>
+                  <a:schemeClr val="tx1"/>
+                </a:solidFill>
+              </a:rPr>
               <a:t>Zaključak</a:t>
             </a:r>
           </a:p>
@@ -6627,6 +6561,574 @@
     <p:extLst>
       <p:ext uri="{BB962C8B-B14F-4D97-AF65-F5344CB8AC3E}">
         <p14:creationId xmlns:p14="http://schemas.microsoft.com/office/powerpoint/2010/main" val="3309312813"/>
+      </p:ext>
+    </p:extLst>
+  </p:cSld>
+  <p:clrMapOvr>
+    <a:masterClrMapping/>
+  </p:clrMapOvr>
+</p:sld>
+</file>
+
+<file path=ppt/slides/slide13.xml><?xml version="1.0" encoding="utf-8"?>
+<p:sld xmlns:a="http://schemas.openxmlformats.org/drawingml/2006/main" xmlns:r="http://schemas.openxmlformats.org/officeDocument/2006/relationships" xmlns:p="http://schemas.openxmlformats.org/presentationml/2006/main">
+  <p:cSld>
+    <p:spTree>
+      <p:nvGrpSpPr>
+        <p:cNvPr id="1" name=""/>
+        <p:cNvGrpSpPr/>
+        <p:nvPr/>
+      </p:nvGrpSpPr>
+      <p:grpSpPr>
+        <a:xfrm>
+          <a:off x="0" y="0"/>
+          <a:ext cx="0" cy="0"/>
+          <a:chOff x="0" y="0"/>
+          <a:chExt cx="0" cy="0"/>
+        </a:xfrm>
+      </p:grpSpPr>
+      <p:sp>
+        <p:nvSpPr>
+          <p:cNvPr id="2" name="Naslov 1">
+            <a:extLst>
+              <a:ext uri="{FF2B5EF4-FFF2-40B4-BE49-F238E27FC236}">
+                <a16:creationId xmlns:a16="http://schemas.microsoft.com/office/drawing/2014/main" id="{D9836082-D048-4E9F-9628-68FE17B04A30}"/>
+              </a:ext>
+            </a:extLst>
+          </p:cNvPr>
+          <p:cNvSpPr>
+            <a:spLocks noGrp="1"/>
+          </p:cNvSpPr>
+          <p:nvPr>
+            <p:ph type="title"/>
+          </p:nvPr>
+        </p:nvSpPr>
+        <p:spPr/>
+        <p:txBody>
+          <a:bodyPr/>
+          <a:lstStyle/>
+          <a:p>
+            <a:r>
+              <a:rPr lang="hr-HR" dirty="0">
+                <a:solidFill>
+                  <a:schemeClr val="tx1"/>
+                </a:solidFill>
+              </a:rPr>
+              <a:t>Daljnji plan rada</a:t>
+            </a:r>
+          </a:p>
+        </p:txBody>
+      </p:sp>
+      <p:sp>
+        <p:nvSpPr>
+          <p:cNvPr id="3" name="Rezervirano mjesto sadržaja 2">
+            <a:extLst>
+              <a:ext uri="{FF2B5EF4-FFF2-40B4-BE49-F238E27FC236}">
+                <a16:creationId xmlns:a16="http://schemas.microsoft.com/office/drawing/2014/main" id="{70536C48-932C-46E7-80B8-714272667158}"/>
+              </a:ext>
+            </a:extLst>
+          </p:cNvPr>
+          <p:cNvSpPr>
+            <a:spLocks noGrp="1"/>
+          </p:cNvSpPr>
+          <p:nvPr>
+            <p:ph idx="1"/>
+          </p:nvPr>
+        </p:nvSpPr>
+        <p:spPr/>
+        <p:txBody>
+          <a:bodyPr/>
+          <a:lstStyle/>
+          <a:p>
+            <a:r>
+              <a:rPr lang="hr-HR" dirty="0">
+                <a:solidFill>
+                  <a:schemeClr val="tx1"/>
+                </a:solidFill>
+                <a:effectLst/>
+              </a:rPr>
+              <a:t>Testirati manje </a:t>
+            </a:r>
+            <a:r>
+              <a:rPr lang="hr-HR" dirty="0" err="1">
+                <a:solidFill>
+                  <a:schemeClr val="tx1"/>
+                </a:solidFill>
+                <a:effectLst/>
+              </a:rPr>
+              <a:t>timestepove</a:t>
+            </a:r>
+            <a:r>
+              <a:rPr lang="hr-HR" dirty="0">
+                <a:solidFill>
+                  <a:schemeClr val="tx1"/>
+                </a:solidFill>
+                <a:effectLst/>
+              </a:rPr>
+              <a:t> i jaču normalizaciju kako bi se smanjilo vrijeme treniranja uz što manju promjenu točnosti.</a:t>
+            </a:r>
+          </a:p>
+          <a:p>
+            <a:r>
+              <a:rPr lang="hr-HR" dirty="0">
+                <a:solidFill>
+                  <a:schemeClr val="tx1"/>
+                </a:solidFill>
+                <a:effectLst/>
+              </a:rPr>
+              <a:t>Evaluirati </a:t>
+            </a:r>
+            <a:r>
+              <a:rPr lang="hr-HR" dirty="0" err="1">
+                <a:solidFill>
+                  <a:schemeClr val="tx1"/>
+                </a:solidFill>
+                <a:effectLst/>
+              </a:rPr>
+              <a:t>trade-off</a:t>
+            </a:r>
+            <a:r>
+              <a:rPr lang="hr-HR" dirty="0">
+                <a:solidFill>
+                  <a:schemeClr val="tx1"/>
+                </a:solidFill>
+                <a:effectLst/>
+              </a:rPr>
+              <a:t> </a:t>
+            </a:r>
+            <a:r>
+              <a:rPr lang="hr-HR" dirty="0" err="1">
+                <a:solidFill>
+                  <a:schemeClr val="tx1"/>
+                </a:solidFill>
+                <a:effectLst/>
+              </a:rPr>
+              <a:t>spike</a:t>
+            </a:r>
+            <a:r>
+              <a:rPr lang="hr-HR" dirty="0">
+                <a:solidFill>
+                  <a:schemeClr val="tx1"/>
+                </a:solidFill>
+                <a:effectLst/>
+              </a:rPr>
+              <a:t> aktivnosti i brzine treniranja</a:t>
+            </a:r>
+          </a:p>
+          <a:p>
+            <a:pPr marL="36900" indent="0">
+              <a:buNone/>
+            </a:pPr>
+            <a:endParaRPr lang="hr-HR" dirty="0">
+              <a:solidFill>
+                <a:schemeClr val="tx1"/>
+              </a:solidFill>
+              <a:effectLst/>
+            </a:endParaRPr>
+          </a:p>
+          <a:p>
+            <a:endParaRPr lang="hr-HR" dirty="0"/>
+          </a:p>
+        </p:txBody>
+      </p:sp>
+    </p:spTree>
+    <p:extLst>
+      <p:ext uri="{BB962C8B-B14F-4D97-AF65-F5344CB8AC3E}">
+        <p14:creationId xmlns:p14="http://schemas.microsoft.com/office/powerpoint/2010/main" val="2762488501"/>
+      </p:ext>
+    </p:extLst>
+  </p:cSld>
+  <p:clrMapOvr>
+    <a:masterClrMapping/>
+  </p:clrMapOvr>
+</p:sld>
+</file>
+
+<file path=ppt/slides/slide14.xml><?xml version="1.0" encoding="utf-8"?>
+<p:sld xmlns:a="http://schemas.openxmlformats.org/drawingml/2006/main" xmlns:r="http://schemas.openxmlformats.org/officeDocument/2006/relationships" xmlns:p="http://schemas.openxmlformats.org/presentationml/2006/main">
+  <p:cSld>
+    <p:spTree>
+      <p:nvGrpSpPr>
+        <p:cNvPr id="1" name=""/>
+        <p:cNvGrpSpPr/>
+        <p:nvPr/>
+      </p:nvGrpSpPr>
+      <p:grpSpPr>
+        <a:xfrm>
+          <a:off x="0" y="0"/>
+          <a:ext cx="0" cy="0"/>
+          <a:chOff x="0" y="0"/>
+          <a:chExt cx="0" cy="0"/>
+        </a:xfrm>
+      </p:grpSpPr>
+      <p:sp>
+        <p:nvSpPr>
+          <p:cNvPr id="2" name="Naslov 1">
+            <a:extLst>
+              <a:ext uri="{FF2B5EF4-FFF2-40B4-BE49-F238E27FC236}">
+                <a16:creationId xmlns:a16="http://schemas.microsoft.com/office/drawing/2014/main" id="{889914DB-8B9C-4AC4-99D4-2E911EE270AC}"/>
+              </a:ext>
+            </a:extLst>
+          </p:cNvPr>
+          <p:cNvSpPr>
+            <a:spLocks noGrp="1"/>
+          </p:cNvSpPr>
+          <p:nvPr>
+            <p:ph type="title"/>
+          </p:nvPr>
+        </p:nvSpPr>
+        <p:spPr/>
+        <p:txBody>
+          <a:bodyPr/>
+          <a:lstStyle/>
+          <a:p>
+            <a:r>
+              <a:rPr lang="hr-HR" dirty="0">
+                <a:solidFill>
+                  <a:schemeClr val="tx1"/>
+                </a:solidFill>
+              </a:rPr>
+              <a:t>Reference</a:t>
+            </a:r>
+          </a:p>
+        </p:txBody>
+      </p:sp>
+      <p:sp>
+        <p:nvSpPr>
+          <p:cNvPr id="3" name="Rezervirano mjesto sadržaja 2">
+            <a:extLst>
+              <a:ext uri="{FF2B5EF4-FFF2-40B4-BE49-F238E27FC236}">
+                <a16:creationId xmlns:a16="http://schemas.microsoft.com/office/drawing/2014/main" id="{1798F939-FD71-4C3D-B7CD-A9D1D94E4975}"/>
+              </a:ext>
+            </a:extLst>
+          </p:cNvPr>
+          <p:cNvSpPr>
+            <a:spLocks noGrp="1"/>
+          </p:cNvSpPr>
+          <p:nvPr>
+            <p:ph idx="1"/>
+          </p:nvPr>
+        </p:nvSpPr>
+        <p:spPr/>
+        <p:txBody>
+          <a:bodyPr/>
+          <a:lstStyle/>
+          <a:p>
+            <a:r>
+              <a:rPr lang="en-US" dirty="0">
+                <a:solidFill>
+                  <a:schemeClr val="tx1"/>
+                </a:solidFill>
+              </a:rPr>
+              <a:t>W. </a:t>
+            </a:r>
+            <a:r>
+              <a:rPr lang="en-US" dirty="0" err="1">
+                <a:solidFill>
+                  <a:schemeClr val="tx1"/>
+                </a:solidFill>
+              </a:rPr>
+              <a:t>Maass</a:t>
+            </a:r>
+            <a:r>
+              <a:rPr lang="en-US" dirty="0">
+                <a:solidFill>
+                  <a:schemeClr val="tx1"/>
+                </a:solidFill>
+              </a:rPr>
+              <a:t>, “Networks of spiking neurons: The third generation of neural network models</a:t>
+            </a:r>
+            <a:r>
+              <a:rPr lang="hr-HR" dirty="0">
+                <a:solidFill>
+                  <a:schemeClr val="tx1"/>
+                </a:solidFill>
+              </a:rPr>
+              <a:t>,</a:t>
+            </a:r>
+            <a:r>
+              <a:rPr lang="en-US" dirty="0">
+                <a:solidFill>
+                  <a:schemeClr val="tx1"/>
+                </a:solidFill>
+              </a:rPr>
+              <a:t>”</a:t>
+            </a:r>
+            <a:r>
+              <a:rPr lang="hr-HR" dirty="0">
+                <a:solidFill>
+                  <a:schemeClr val="tx1"/>
+                </a:solidFill>
+              </a:rPr>
+              <a:t> </a:t>
+            </a:r>
+            <a:r>
+              <a:rPr lang="en-US" dirty="0">
+                <a:solidFill>
+                  <a:schemeClr val="tx1"/>
+                </a:solidFill>
+              </a:rPr>
+              <a:t>1997.</a:t>
+            </a:r>
+            <a:endParaRPr lang="hr-HR" dirty="0">
+              <a:solidFill>
+                <a:schemeClr val="tx1"/>
+              </a:solidFill>
+            </a:endParaRPr>
+          </a:p>
+          <a:p>
+            <a:r>
+              <a:rPr lang="en-US" dirty="0">
+                <a:solidFill>
+                  <a:schemeClr val="tx1"/>
+                </a:solidFill>
+              </a:rPr>
+              <a:t>K. Roy, A. Jaiswal, and P. Panda, “Towards spike-based machine intelligence with neuromorphic computing</a:t>
+            </a:r>
+            <a:r>
+              <a:rPr lang="hr-HR" dirty="0">
+                <a:solidFill>
+                  <a:schemeClr val="tx1"/>
+                </a:solidFill>
+              </a:rPr>
+              <a:t>,</a:t>
+            </a:r>
+            <a:r>
+              <a:rPr lang="en-US" dirty="0">
+                <a:solidFill>
+                  <a:schemeClr val="tx1"/>
+                </a:solidFill>
+              </a:rPr>
+              <a:t>” 2019.</a:t>
+            </a:r>
+            <a:endParaRPr lang="hr-HR" dirty="0">
+              <a:solidFill>
+                <a:schemeClr val="tx1"/>
+              </a:solidFill>
+            </a:endParaRPr>
+          </a:p>
+          <a:p>
+            <a:r>
+              <a:rPr lang="en-US" dirty="0">
+                <a:solidFill>
+                  <a:schemeClr val="tx1"/>
+                </a:solidFill>
+              </a:rPr>
+              <a:t>C. Zhou et al., “Direct training high-performance deep spiking neural networks: A review of theories and methods,” 2024.</a:t>
+            </a:r>
+            <a:endParaRPr lang="hr-HR" dirty="0">
+              <a:solidFill>
+                <a:schemeClr val="tx1"/>
+              </a:solidFill>
+            </a:endParaRPr>
+          </a:p>
+          <a:p>
+            <a:r>
+              <a:rPr lang="en-US" dirty="0">
+                <a:solidFill>
+                  <a:schemeClr val="tx1"/>
+                </a:solidFill>
+              </a:rPr>
+              <a:t>S.-H. Cha and D.-S. Kim, “Efficient training of deep spiking neural networks using a modified learning rate scheduler,”</a:t>
+            </a:r>
+            <a:r>
+              <a:rPr lang="hr-HR" dirty="0">
+                <a:solidFill>
+                  <a:schemeClr val="tx1"/>
+                </a:solidFill>
+              </a:rPr>
+              <a:t> </a:t>
+            </a:r>
+            <a:r>
+              <a:rPr lang="en-US" dirty="0">
+                <a:solidFill>
+                  <a:schemeClr val="tx1"/>
+                </a:solidFill>
+              </a:rPr>
+              <a:t>2025.</a:t>
+            </a:r>
+            <a:endParaRPr lang="hr-HR" dirty="0">
+              <a:solidFill>
+                <a:schemeClr val="tx1"/>
+              </a:solidFill>
+            </a:endParaRPr>
+          </a:p>
+          <a:p>
+            <a:r>
+              <a:rPr lang="hr-HR" dirty="0">
+                <a:solidFill>
+                  <a:schemeClr val="tx1"/>
+                </a:solidFill>
+              </a:rPr>
+              <a:t>C. </a:t>
+            </a:r>
+            <a:r>
+              <a:rPr lang="hr-HR" dirty="0" err="1">
+                <a:solidFill>
+                  <a:schemeClr val="tx1"/>
+                </a:solidFill>
+              </a:rPr>
+              <a:t>Zhou</a:t>
+            </a:r>
+            <a:r>
+              <a:rPr lang="hr-HR" dirty="0">
+                <a:solidFill>
+                  <a:schemeClr val="tx1"/>
+                </a:solidFill>
+              </a:rPr>
+              <a:t> </a:t>
+            </a:r>
+            <a:r>
+              <a:rPr lang="hr-HR" dirty="0" err="1">
+                <a:solidFill>
+                  <a:schemeClr val="tx1"/>
+                </a:solidFill>
+              </a:rPr>
+              <a:t>et</a:t>
+            </a:r>
+            <a:r>
+              <a:rPr lang="hr-HR" dirty="0">
+                <a:solidFill>
+                  <a:schemeClr val="tx1"/>
+                </a:solidFill>
+              </a:rPr>
+              <a:t> </a:t>
+            </a:r>
+            <a:r>
+              <a:rPr lang="hr-HR" dirty="0" err="1">
+                <a:solidFill>
+                  <a:schemeClr val="tx1"/>
+                </a:solidFill>
+              </a:rPr>
+              <a:t>al</a:t>
+            </a:r>
+            <a:r>
+              <a:rPr lang="hr-HR" dirty="0">
+                <a:solidFill>
+                  <a:schemeClr val="tx1"/>
+                </a:solidFill>
+              </a:rPr>
+              <a:t>., “</a:t>
+            </a:r>
+            <a:r>
+              <a:rPr lang="hr-HR" dirty="0" err="1">
+                <a:solidFill>
+                  <a:schemeClr val="tx1"/>
+                </a:solidFill>
+              </a:rPr>
+              <a:t>Spikingformer</a:t>
+            </a:r>
+            <a:r>
+              <a:rPr lang="hr-HR" dirty="0">
+                <a:solidFill>
+                  <a:schemeClr val="tx1"/>
+                </a:solidFill>
+              </a:rPr>
+              <a:t>: </a:t>
+            </a:r>
+            <a:r>
+              <a:rPr lang="hr-HR" dirty="0" err="1">
+                <a:solidFill>
+                  <a:schemeClr val="tx1"/>
+                </a:solidFill>
+              </a:rPr>
+              <a:t>Spike-driven</a:t>
+            </a:r>
+            <a:r>
+              <a:rPr lang="hr-HR" dirty="0">
+                <a:solidFill>
+                  <a:schemeClr val="tx1"/>
+                </a:solidFill>
+              </a:rPr>
+              <a:t> </a:t>
+            </a:r>
+            <a:r>
+              <a:rPr lang="hr-HR" dirty="0" err="1">
+                <a:solidFill>
+                  <a:schemeClr val="tx1"/>
+                </a:solidFill>
+              </a:rPr>
+              <a:t>residual</a:t>
+            </a:r>
+            <a:r>
+              <a:rPr lang="hr-HR" dirty="0">
+                <a:solidFill>
+                  <a:schemeClr val="tx1"/>
+                </a:solidFill>
+              </a:rPr>
+              <a:t> </a:t>
+            </a:r>
+            <a:r>
+              <a:rPr lang="hr-HR" dirty="0" err="1">
+                <a:solidFill>
+                  <a:schemeClr val="tx1"/>
+                </a:solidFill>
+              </a:rPr>
+              <a:t>learning</a:t>
+            </a:r>
+            <a:r>
+              <a:rPr lang="hr-HR" dirty="0">
+                <a:solidFill>
+                  <a:schemeClr val="tx1"/>
+                </a:solidFill>
+              </a:rPr>
+              <a:t> for </a:t>
+            </a:r>
+            <a:r>
+              <a:rPr lang="hr-HR" dirty="0" err="1">
+                <a:solidFill>
+                  <a:schemeClr val="tx1"/>
+                </a:solidFill>
+              </a:rPr>
+              <a:t>transformer-based</a:t>
+            </a:r>
+            <a:r>
+              <a:rPr lang="hr-HR" dirty="0">
+                <a:solidFill>
+                  <a:schemeClr val="tx1"/>
+                </a:solidFill>
+              </a:rPr>
+              <a:t> </a:t>
+            </a:r>
+            <a:r>
+              <a:rPr lang="hr-HR" dirty="0" err="1">
+                <a:solidFill>
+                  <a:schemeClr val="tx1"/>
+                </a:solidFill>
+              </a:rPr>
+              <a:t>spiking</a:t>
+            </a:r>
+            <a:r>
+              <a:rPr lang="hr-HR" dirty="0">
+                <a:solidFill>
+                  <a:schemeClr val="tx1"/>
+                </a:solidFill>
+              </a:rPr>
+              <a:t> </a:t>
+            </a:r>
+            <a:r>
+              <a:rPr lang="hr-HR" dirty="0" err="1">
+                <a:solidFill>
+                  <a:schemeClr val="tx1"/>
+                </a:solidFill>
+              </a:rPr>
+              <a:t>neural</a:t>
+            </a:r>
+            <a:r>
+              <a:rPr lang="hr-HR" dirty="0">
+                <a:solidFill>
+                  <a:schemeClr val="tx1"/>
+                </a:solidFill>
+              </a:rPr>
+              <a:t> network,” 2023.</a:t>
+            </a:r>
+          </a:p>
+        </p:txBody>
+      </p:sp>
+    </p:spTree>
+    <p:extLst>
+      <p:ext uri="{BB962C8B-B14F-4D97-AF65-F5344CB8AC3E}">
+        <p14:creationId xmlns:p14="http://schemas.microsoft.com/office/powerpoint/2010/main" val="3527425308"/>
       </p:ext>
     </p:extLst>
   </p:cSld>
@@ -7351,7 +7853,12 @@
             <p:ph idx="1"/>
           </p:nvPr>
         </p:nvSpPr>
-        <p:spPr/>
+        <p:spPr>
+          <a:xfrm>
+            <a:off x="707010" y="1732449"/>
+            <a:ext cx="10765411" cy="4310132"/>
+          </a:xfrm>
+        </p:spPr>
         <p:txBody>
           <a:bodyPr>
             <a:normAutofit/>
@@ -7359,12 +7866,20 @@
           <a:lstStyle/>
           <a:p>
             <a:r>
+              <a:rPr lang="hr-HR" sz="2400" b="1" dirty="0">
+                <a:solidFill>
+                  <a:schemeClr val="tx1"/>
+                </a:solidFill>
+              </a:rPr>
+              <a:t>MNIST</a:t>
+            </a:r>
+            <a:r>
               <a:rPr lang="hr-HR" sz="2400" dirty="0">
                 <a:solidFill>
                   <a:schemeClr val="tx1"/>
                 </a:solidFill>
               </a:rPr>
-              <a:t>MNIST - </a:t>
+              <a:t> - </a:t>
             </a:r>
             <a:r>
               <a:rPr lang="pl-PL" sz="2400" dirty="0">
@@ -7377,12 +7892,20 @@
           </a:p>
           <a:p>
             <a:r>
+              <a:rPr lang="pl-PL" sz="2400" b="1" dirty="0">
+                <a:solidFill>
+                  <a:schemeClr val="tx1"/>
+                </a:solidFill>
+              </a:rPr>
+              <a:t>CIFAR10 </a:t>
+            </a:r>
+            <a:r>
               <a:rPr lang="pl-PL" sz="2400" dirty="0">
                 <a:solidFill>
                   <a:schemeClr val="tx1"/>
                 </a:solidFill>
               </a:rPr>
-              <a:t>CIFAR10 - </a:t>
+              <a:t>- </a:t>
             </a:r>
             <a:r>
               <a:rPr lang="hr-HR" sz="2400" dirty="0">
@@ -7395,12 +7918,20 @@
           </a:p>
           <a:p>
             <a:r>
+              <a:rPr lang="hr-HR" sz="2400" b="1" dirty="0">
+                <a:solidFill>
+                  <a:schemeClr val="tx1"/>
+                </a:solidFill>
+              </a:rPr>
+              <a:t>CIFAR100</a:t>
+            </a:r>
+            <a:r>
               <a:rPr lang="hr-HR" sz="2400" dirty="0">
                 <a:solidFill>
                   <a:schemeClr val="tx1"/>
                 </a:solidFill>
               </a:rPr>
-              <a:t>CIFAR100 - </a:t>
+              <a:t> - </a:t>
             </a:r>
             <a:r>
               <a:rPr lang="pl-PL" sz="2400" dirty="0">
@@ -7410,15 +7941,31 @@
               </a:rPr>
               <a:t>kompleksniji skup (32×32, RGB, 100 klasa)</a:t>
             </a:r>
-          </a:p>
-          <a:p>
-            <a:r>
-              <a:rPr lang="pl-PL" sz="2400" dirty="0">
-                <a:solidFill>
-                  <a:schemeClr val="tx1"/>
-                </a:solidFill>
-              </a:rPr>
-              <a:t>Potencijalno </a:t>
+            <a:r>
+              <a:rPr lang="hr-HR" sz="2400" b="1" dirty="0">
+                <a:solidFill>
+                  <a:schemeClr val="tx1"/>
+                </a:solidFill>
+              </a:rPr>
+              <a:t> </a:t>
+            </a:r>
+          </a:p>
+          <a:p>
+            <a:r>
+              <a:rPr lang="hr-HR" sz="2400" b="1" dirty="0">
+                <a:solidFill>
+                  <a:schemeClr val="tx1"/>
+                </a:solidFill>
+              </a:rPr>
+              <a:t>N-MNIST</a:t>
+            </a:r>
+            <a:r>
+              <a:rPr lang="hr-HR" sz="2400" dirty="0">
+                <a:solidFill>
+                  <a:schemeClr val="tx1"/>
+                </a:solidFill>
+              </a:rPr>
+              <a:t> – </a:t>
             </a:r>
             <a:r>
               <a:rPr lang="hr-HR" sz="2400" dirty="0" err="1">
@@ -7426,7 +7973,7 @@
                   <a:schemeClr val="tx1"/>
                 </a:solidFill>
               </a:rPr>
-              <a:t>neuromorphic</a:t>
+              <a:t>neuromorfni</a:t>
             </a:r>
             <a:r>
               <a:rPr lang="hr-HR" sz="2400" dirty="0">
@@ -7434,7 +7981,7 @@
                   <a:schemeClr val="tx1"/>
                 </a:solidFill>
               </a:rPr>
-              <a:t> </a:t>
+              <a:t> skup podataka dobiven snimanjem originalnog MNIST-a event-</a:t>
             </a:r>
             <a:r>
               <a:rPr lang="hr-HR" sz="2400" dirty="0" err="1">
@@ -7442,7 +7989,7 @@
                   <a:schemeClr val="tx1"/>
                 </a:solidFill>
               </a:rPr>
-              <a:t>dataseti</a:t>
+              <a:t>based</a:t>
             </a:r>
             <a:r>
               <a:rPr lang="hr-HR" sz="2400" dirty="0">
@@ -7450,8 +7997,29 @@
                   <a:schemeClr val="tx1"/>
                 </a:solidFill>
               </a:rPr>
-              <a:t> – dizajnirani za SNN-ove</a:t>
-            </a:r>
+              <a:t> kamerom. Umjesto klasičnih slika, podaci su predstavljeni kao niz događaja (</a:t>
+            </a:r>
+            <a:r>
+              <a:rPr lang="hr-HR" sz="2400" dirty="0" err="1">
+                <a:solidFill>
+                  <a:schemeClr val="tx1"/>
+                </a:solidFill>
+              </a:rPr>
+              <a:t>spikeova</a:t>
+            </a:r>
+            <a:r>
+              <a:rPr lang="hr-HR" sz="2400" dirty="0">
+                <a:solidFill>
+                  <a:schemeClr val="tx1"/>
+                </a:solidFill>
+              </a:rPr>
+              <a:t>) s prostorno-vremenskim informacijama. 10 klasa.</a:t>
+            </a:r>
+            <a:endParaRPr lang="pl-PL" sz="2400" dirty="0">
+              <a:solidFill>
+                <a:schemeClr val="tx1"/>
+              </a:solidFill>
+            </a:endParaRPr>
           </a:p>
         </p:txBody>
       </p:sp>
@@ -7522,12 +8090,220 @@
           </a:p>
         </p:txBody>
       </p:sp>
+      <p:sp>
+        <p:nvSpPr>
+          <p:cNvPr id="8" name="TekstniOkvir 7">
+            <a:extLst>
+              <a:ext uri="{FF2B5EF4-FFF2-40B4-BE49-F238E27FC236}">
+                <a16:creationId xmlns:a16="http://schemas.microsoft.com/office/drawing/2014/main" id="{E8D02ABA-1887-4130-882C-4B1FC38CB842}"/>
+              </a:ext>
+            </a:extLst>
+          </p:cNvPr>
+          <p:cNvSpPr txBox="1"/>
+          <p:nvPr/>
+        </p:nvSpPr>
+        <p:spPr>
+          <a:xfrm>
+            <a:off x="395926" y="1809946"/>
+            <a:ext cx="7051249" cy="4093428"/>
+          </a:xfrm>
+          <a:prstGeom prst="rect">
+            <a:avLst/>
+          </a:prstGeom>
+          <a:noFill/>
+        </p:spPr>
+        <p:txBody>
+          <a:bodyPr wrap="square" rtlCol="0">
+            <a:spAutoFit/>
+          </a:bodyPr>
+          <a:lstStyle/>
+          <a:p>
+            <a:r>
+              <a:rPr lang="hr-HR" sz="2400" dirty="0"/>
+              <a:t>Dosadašnji radovi:</a:t>
+            </a:r>
+          </a:p>
+          <a:p>
+            <a:pPr marL="285750" indent="-285750">
+              <a:buFont typeface="Arial" panose="020B0604020202020204" pitchFamily="34" charset="0"/>
+              <a:buChar char="•"/>
+            </a:pPr>
+            <a:r>
+              <a:rPr lang="hr-HR" sz="2000" dirty="0"/>
+              <a:t>Korištene su </a:t>
+            </a:r>
+            <a:r>
+              <a:rPr lang="hr-HR" sz="2000" dirty="0" err="1"/>
+              <a:t>fixed</a:t>
+            </a:r>
+            <a:r>
+              <a:rPr lang="hr-HR" sz="2000" dirty="0"/>
+              <a:t> i </a:t>
+            </a:r>
+            <a:r>
+              <a:rPr lang="hr-HR" sz="2000" dirty="0" err="1"/>
+              <a:t>adaptive</a:t>
+            </a:r>
+            <a:r>
+              <a:rPr lang="hr-HR" sz="2000" dirty="0"/>
+              <a:t> </a:t>
+            </a:r>
+            <a:r>
+              <a:rPr lang="hr-HR" sz="2000" dirty="0" err="1"/>
+              <a:t>surrogate</a:t>
+            </a:r>
+            <a:r>
+              <a:rPr lang="hr-HR" sz="2000" dirty="0"/>
+              <a:t> </a:t>
+            </a:r>
+            <a:r>
+              <a:rPr lang="hr-HR" sz="2000" dirty="0" err="1"/>
+              <a:t>gradient</a:t>
+            </a:r>
+            <a:r>
+              <a:rPr lang="hr-HR" sz="2000" dirty="0"/>
+              <a:t> metode</a:t>
+            </a:r>
+          </a:p>
+          <a:p>
+            <a:pPr marL="285750" indent="-285750">
+              <a:buFont typeface="Arial" panose="020B0604020202020204" pitchFamily="34" charset="0"/>
+              <a:buChar char="•"/>
+            </a:pPr>
+            <a:r>
+              <a:rPr lang="hr-HR" sz="2000" dirty="0"/>
+              <a:t>Najčešće </a:t>
+            </a:r>
+            <a:r>
+              <a:rPr lang="hr-HR" sz="2000" dirty="0" err="1"/>
+              <a:t>surrogate</a:t>
+            </a:r>
+            <a:r>
+              <a:rPr lang="hr-HR" sz="2000" dirty="0"/>
+              <a:t> funkcije: </a:t>
+            </a:r>
+            <a:r>
+              <a:rPr lang="hr-HR" sz="2000" dirty="0" err="1"/>
+              <a:t>sigmoid</a:t>
+            </a:r>
+            <a:r>
+              <a:rPr lang="hr-HR" sz="2000" dirty="0"/>
+              <a:t>, </a:t>
+            </a:r>
+            <a:r>
+              <a:rPr lang="hr-HR" sz="2000" dirty="0" err="1"/>
+              <a:t>exponential</a:t>
+            </a:r>
+            <a:r>
+              <a:rPr lang="hr-HR" sz="2000" dirty="0"/>
+              <a:t>, </a:t>
+            </a:r>
+            <a:r>
+              <a:rPr lang="hr-HR" sz="2000" dirty="0" err="1"/>
+              <a:t>piecewise</a:t>
+            </a:r>
+            <a:r>
+              <a:rPr lang="hr-HR" sz="2000" dirty="0"/>
+              <a:t> </a:t>
+            </a:r>
+            <a:r>
+              <a:rPr lang="hr-HR" sz="2000" dirty="0" err="1"/>
+              <a:t>linear</a:t>
+            </a:r>
+            <a:endParaRPr lang="hr-HR" sz="2000" dirty="0"/>
+          </a:p>
+          <a:p>
+            <a:r>
+              <a:rPr lang="hr-HR" sz="2400" dirty="0"/>
+              <a:t>Dosadašnji rezultati:</a:t>
+            </a:r>
+          </a:p>
+          <a:p>
+            <a:pPr marL="285750" indent="-285750">
+              <a:buFont typeface="Arial" panose="020B0604020202020204" pitchFamily="34" charset="0"/>
+              <a:buChar char="•"/>
+            </a:pPr>
+            <a:r>
+              <a:rPr lang="hr-HR" sz="2000" dirty="0" err="1"/>
+              <a:t>Surrogate</a:t>
+            </a:r>
+            <a:r>
+              <a:rPr lang="hr-HR" sz="2000" dirty="0"/>
+              <a:t> </a:t>
+            </a:r>
+            <a:r>
+              <a:rPr lang="hr-HR" sz="2000" dirty="0" err="1"/>
+              <a:t>gradient</a:t>
+            </a:r>
+            <a:r>
+              <a:rPr lang="hr-HR" sz="2000" dirty="0"/>
+              <a:t> omogućuje učinkovito treniranje SNN modela</a:t>
+            </a:r>
+          </a:p>
+          <a:p>
+            <a:pPr marL="285750" indent="-285750">
+              <a:buFont typeface="Arial" panose="020B0604020202020204" pitchFamily="34" charset="0"/>
+              <a:buChar char="•"/>
+            </a:pPr>
+            <a:r>
+              <a:rPr lang="hr-HR" sz="2000" dirty="0" err="1"/>
+              <a:t>Adaptive</a:t>
+            </a:r>
+            <a:r>
+              <a:rPr lang="hr-HR" sz="2000" dirty="0"/>
+              <a:t> pristupi često poboljšavaju stabilnost i konvergenciju</a:t>
+            </a:r>
+          </a:p>
+          <a:p>
+            <a:r>
+              <a:rPr lang="hr-HR" sz="2400" dirty="0"/>
+              <a:t>Nedostatci:</a:t>
+            </a:r>
+          </a:p>
+          <a:p>
+            <a:pPr marL="285750" indent="-285750">
+              <a:buFont typeface="Arial" panose="020B0604020202020204" pitchFamily="34" charset="0"/>
+              <a:buChar char="•"/>
+            </a:pPr>
+            <a:r>
+              <a:rPr lang="pl-PL" sz="2000" dirty="0"/>
+              <a:t>Nema standardne najbolje surrogate funkcije</a:t>
+            </a:r>
+          </a:p>
+          <a:p>
+            <a:pPr marL="285750" indent="-285750">
+              <a:buFont typeface="Arial" panose="020B0604020202020204" pitchFamily="34" charset="0"/>
+              <a:buChar char="•"/>
+            </a:pPr>
+            <a:r>
+              <a:rPr lang="hr-HR" sz="2000" dirty="0"/>
+              <a:t>Malo direktnih usporedbi </a:t>
+            </a:r>
+            <a:r>
+              <a:rPr lang="hr-HR" sz="2000" dirty="0" err="1"/>
+              <a:t>adaptive</a:t>
+            </a:r>
+            <a:r>
+              <a:rPr lang="hr-HR" sz="2000" dirty="0"/>
+              <a:t> i </a:t>
+            </a:r>
+            <a:r>
+              <a:rPr lang="hr-HR" sz="2000" dirty="0" err="1"/>
+              <a:t>fixed</a:t>
+            </a:r>
+            <a:r>
+              <a:rPr lang="hr-HR" sz="2000" dirty="0"/>
+              <a:t> pristupa</a:t>
+            </a:r>
+          </a:p>
+        </p:txBody>
+      </p:sp>
       <p:pic>
         <p:nvPicPr>
-          <p:cNvPr id="7" name="Rezervirano mjesto sadržaja 6">
+          <p:cNvPr id="16" name="Rezervirano mjesto sadržaja 15">
             <a:extLst>
               <a:ext uri="{FF2B5EF4-FFF2-40B4-BE49-F238E27FC236}">
-                <a16:creationId xmlns:a16="http://schemas.microsoft.com/office/drawing/2014/main" id="{E7F28D34-854B-43EC-A9B6-B86678390E9D}"/>
+                <a16:creationId xmlns:a16="http://schemas.microsoft.com/office/drawing/2014/main" id="{42D85352-3B63-4555-96E9-1B6ED55C39FE}"/>
               </a:ext>
             </a:extLst>
           </p:cNvPr>
@@ -7552,219 +8328,11 @@
         </p:blipFill>
         <p:spPr>
           <a:xfrm>
-            <a:off x="7532016" y="1580050"/>
-            <a:ext cx="4379177" cy="4903787"/>
+            <a:off x="7447175" y="2036191"/>
+            <a:ext cx="4462020" cy="4449450"/>
           </a:xfrm>
         </p:spPr>
       </p:pic>
-      <p:sp>
-        <p:nvSpPr>
-          <p:cNvPr id="8" name="TekstniOkvir 7">
-            <a:extLst>
-              <a:ext uri="{FF2B5EF4-FFF2-40B4-BE49-F238E27FC236}">
-                <a16:creationId xmlns:a16="http://schemas.microsoft.com/office/drawing/2014/main" id="{E8D02ABA-1887-4130-882C-4B1FC38CB842}"/>
-              </a:ext>
-            </a:extLst>
-          </p:cNvPr>
-          <p:cNvSpPr txBox="1"/>
-          <p:nvPr/>
-        </p:nvSpPr>
-        <p:spPr>
-          <a:xfrm>
-            <a:off x="395926" y="1809946"/>
-            <a:ext cx="7051249" cy="4093428"/>
-          </a:xfrm>
-          <a:prstGeom prst="rect">
-            <a:avLst/>
-          </a:prstGeom>
-          <a:noFill/>
-        </p:spPr>
-        <p:txBody>
-          <a:bodyPr wrap="square" rtlCol="0">
-            <a:spAutoFit/>
-          </a:bodyPr>
-          <a:lstStyle/>
-          <a:p>
-            <a:r>
-              <a:rPr lang="hr-HR" sz="2400" dirty="0"/>
-              <a:t>Dosadašnji radovi:</a:t>
-            </a:r>
-          </a:p>
-          <a:p>
-            <a:pPr marL="285750" indent="-285750">
-              <a:buFont typeface="Arial" panose="020B0604020202020204" pitchFamily="34" charset="0"/>
-              <a:buChar char="•"/>
-            </a:pPr>
-            <a:r>
-              <a:rPr lang="hr-HR" sz="2000" dirty="0"/>
-              <a:t>Korištene su </a:t>
-            </a:r>
-            <a:r>
-              <a:rPr lang="hr-HR" sz="2000" dirty="0" err="1"/>
-              <a:t>fixed</a:t>
-            </a:r>
-            <a:r>
-              <a:rPr lang="hr-HR" sz="2000" dirty="0"/>
-              <a:t> i </a:t>
-            </a:r>
-            <a:r>
-              <a:rPr lang="hr-HR" sz="2000" dirty="0" err="1"/>
-              <a:t>adaptive</a:t>
-            </a:r>
-            <a:r>
-              <a:rPr lang="hr-HR" sz="2000" dirty="0"/>
-              <a:t> </a:t>
-            </a:r>
-            <a:r>
-              <a:rPr lang="hr-HR" sz="2000" dirty="0" err="1"/>
-              <a:t>surrogate</a:t>
-            </a:r>
-            <a:r>
-              <a:rPr lang="hr-HR" sz="2000" dirty="0"/>
-              <a:t> </a:t>
-            </a:r>
-            <a:r>
-              <a:rPr lang="hr-HR" sz="2000" dirty="0" err="1"/>
-              <a:t>gradient</a:t>
-            </a:r>
-            <a:r>
-              <a:rPr lang="hr-HR" sz="2000" dirty="0"/>
-              <a:t> metode</a:t>
-            </a:r>
-          </a:p>
-          <a:p>
-            <a:pPr marL="285750" indent="-285750">
-              <a:buFont typeface="Arial" panose="020B0604020202020204" pitchFamily="34" charset="0"/>
-              <a:buChar char="•"/>
-            </a:pPr>
-            <a:r>
-              <a:rPr lang="hr-HR" sz="2000" dirty="0"/>
-              <a:t>Najčešće </a:t>
-            </a:r>
-            <a:r>
-              <a:rPr lang="hr-HR" sz="2000" dirty="0" err="1"/>
-              <a:t>surrogate</a:t>
-            </a:r>
-            <a:r>
-              <a:rPr lang="hr-HR" sz="2000" dirty="0"/>
-              <a:t> funkcije: </a:t>
-            </a:r>
-            <a:r>
-              <a:rPr lang="hr-HR" sz="2000" dirty="0" err="1"/>
-              <a:t>sigmoid</a:t>
-            </a:r>
-            <a:r>
-              <a:rPr lang="hr-HR" sz="2000" dirty="0"/>
-              <a:t>, </a:t>
-            </a:r>
-            <a:r>
-              <a:rPr lang="hr-HR" sz="2000" dirty="0" err="1"/>
-              <a:t>exponential</a:t>
-            </a:r>
-            <a:r>
-              <a:rPr lang="hr-HR" sz="2000" dirty="0"/>
-              <a:t>, </a:t>
-            </a:r>
-            <a:r>
-              <a:rPr lang="hr-HR" sz="2000" dirty="0" err="1"/>
-              <a:t>piecewise</a:t>
-            </a:r>
-            <a:r>
-              <a:rPr lang="hr-HR" sz="2000" dirty="0"/>
-              <a:t> </a:t>
-            </a:r>
-            <a:r>
-              <a:rPr lang="hr-HR" sz="2000" dirty="0" err="1"/>
-              <a:t>linear</a:t>
-            </a:r>
-            <a:endParaRPr lang="hr-HR" sz="2000" dirty="0"/>
-          </a:p>
-          <a:p>
-            <a:r>
-              <a:rPr lang="hr-HR" sz="2400" dirty="0"/>
-              <a:t>Dosadašnji rezultati:</a:t>
-            </a:r>
-          </a:p>
-          <a:p>
-            <a:pPr marL="285750" indent="-285750">
-              <a:buFont typeface="Arial" panose="020B0604020202020204" pitchFamily="34" charset="0"/>
-              <a:buChar char="•"/>
-            </a:pPr>
-            <a:r>
-              <a:rPr lang="hr-HR" sz="2000" dirty="0" err="1"/>
-              <a:t>Surrogate</a:t>
-            </a:r>
-            <a:r>
-              <a:rPr lang="hr-HR" sz="2000" dirty="0"/>
-              <a:t> </a:t>
-            </a:r>
-            <a:r>
-              <a:rPr lang="hr-HR" sz="2000" dirty="0" err="1"/>
-              <a:t>gradient</a:t>
-            </a:r>
-            <a:r>
-              <a:rPr lang="hr-HR" sz="2000" dirty="0"/>
-              <a:t> omogućuje učinkovito treniranje SNN modela</a:t>
-            </a:r>
-          </a:p>
-          <a:p>
-            <a:pPr marL="285750" indent="-285750">
-              <a:buFont typeface="Arial" panose="020B0604020202020204" pitchFamily="34" charset="0"/>
-              <a:buChar char="•"/>
-            </a:pPr>
-            <a:r>
-              <a:rPr lang="hr-HR" sz="2000" dirty="0" err="1"/>
-              <a:t>Adaptive</a:t>
-            </a:r>
-            <a:r>
-              <a:rPr lang="hr-HR" sz="2000" dirty="0"/>
-              <a:t> pristupi često poboljšavaju stabilnost i konvergenciju</a:t>
-            </a:r>
-          </a:p>
-          <a:p>
-            <a:r>
-              <a:rPr lang="hr-HR" sz="2400" dirty="0"/>
-              <a:t>Nedostatci:</a:t>
-            </a:r>
-          </a:p>
-          <a:p>
-            <a:pPr marL="285750" indent="-285750">
-              <a:buFont typeface="Arial" panose="020B0604020202020204" pitchFamily="34" charset="0"/>
-              <a:buChar char="•"/>
-            </a:pPr>
-            <a:r>
-              <a:rPr lang="pl-PL" sz="2000" dirty="0"/>
-              <a:t>Nema standardne najbolje surrogate funkcije</a:t>
-            </a:r>
-          </a:p>
-          <a:p>
-            <a:pPr marL="285750" indent="-285750">
-              <a:buFont typeface="Arial" panose="020B0604020202020204" pitchFamily="34" charset="0"/>
-              <a:buChar char="•"/>
-            </a:pPr>
-            <a:r>
-              <a:rPr lang="hr-HR" sz="2000" dirty="0"/>
-              <a:t>Malo direktnih usporedbi </a:t>
-            </a:r>
-            <a:r>
-              <a:rPr lang="hr-HR" sz="2000" dirty="0" err="1"/>
-              <a:t>adaptive</a:t>
-            </a:r>
-            <a:r>
-              <a:rPr lang="hr-HR" sz="2000" dirty="0"/>
-              <a:t> i </a:t>
-            </a:r>
-            <a:r>
-              <a:rPr lang="hr-HR" sz="2000" dirty="0" err="1"/>
-              <a:t>fixed</a:t>
-            </a:r>
-            <a:r>
-              <a:rPr lang="hr-HR" sz="2000" dirty="0"/>
-              <a:t> pristupa</a:t>
-            </a:r>
-          </a:p>
-        </p:txBody>
-      </p:sp>
     </p:spTree>
     <p:extLst>
       <p:ext uri="{BB962C8B-B14F-4D97-AF65-F5344CB8AC3E}">
@@ -7851,155 +8419,190 @@
         </p:spPr>
         <p:txBody>
           <a:bodyPr>
-            <a:normAutofit fontScale="92500" lnSpcReduction="10000"/>
+            <a:normAutofit/>
           </a:bodyPr>
           <a:lstStyle/>
           <a:p>
             <a:r>
+              <a:rPr lang="hr-HR" sz="2200" b="1" dirty="0">
+                <a:solidFill>
+                  <a:schemeClr val="tx1"/>
+                </a:solidFill>
+              </a:rPr>
+              <a:t>Odabrani modeli:</a:t>
+            </a:r>
+          </a:p>
+          <a:p>
+            <a:pPr lvl="1"/>
+            <a:r>
+              <a:rPr lang="hr-HR" dirty="0" err="1">
+                <a:solidFill>
+                  <a:schemeClr val="tx1"/>
+                </a:solidFill>
+              </a:rPr>
+              <a:t>Spiking</a:t>
+            </a:r>
+            <a:r>
+              <a:rPr lang="hr-HR" dirty="0">
+                <a:solidFill>
+                  <a:schemeClr val="tx1"/>
+                </a:solidFill>
+              </a:rPr>
+              <a:t> </a:t>
+            </a:r>
+            <a:r>
+              <a:rPr lang="hr-HR" dirty="0" err="1">
+                <a:solidFill>
+                  <a:schemeClr val="tx1"/>
+                </a:solidFill>
+              </a:rPr>
+              <a:t>neural</a:t>
+            </a:r>
+            <a:r>
+              <a:rPr lang="hr-HR" dirty="0">
+                <a:solidFill>
+                  <a:schemeClr val="tx1"/>
+                </a:solidFill>
+              </a:rPr>
+              <a:t> </a:t>
+            </a:r>
+            <a:r>
+              <a:rPr lang="hr-HR" dirty="0" err="1">
+                <a:solidFill>
+                  <a:schemeClr val="tx1"/>
+                </a:solidFill>
+              </a:rPr>
+              <a:t>networks</a:t>
+            </a:r>
+            <a:r>
+              <a:rPr lang="hr-HR" dirty="0">
+                <a:solidFill>
+                  <a:schemeClr val="tx1"/>
+                </a:solidFill>
+              </a:rPr>
+              <a:t> – dvije arhitekture(</a:t>
+            </a:r>
+            <a:r>
+              <a:rPr lang="hr-HR" dirty="0" err="1">
+                <a:solidFill>
+                  <a:schemeClr val="tx1"/>
+                </a:solidFill>
+              </a:rPr>
+              <a:t>SpikingSimpleCNN</a:t>
+            </a:r>
+            <a:r>
+              <a:rPr lang="hr-HR" dirty="0">
+                <a:solidFill>
+                  <a:schemeClr val="tx1"/>
+                </a:solidFill>
+              </a:rPr>
+              <a:t> i </a:t>
+            </a:r>
+            <a:r>
+              <a:rPr lang="hr-HR" dirty="0" err="1">
+                <a:solidFill>
+                  <a:schemeClr val="tx1"/>
+                </a:solidFill>
+              </a:rPr>
+              <a:t>SmallResNet</a:t>
+            </a:r>
+            <a:r>
+              <a:rPr lang="hr-HR" dirty="0">
+                <a:solidFill>
+                  <a:schemeClr val="tx1"/>
+                </a:solidFill>
+              </a:rPr>
+              <a:t>)</a:t>
+            </a:r>
+          </a:p>
+          <a:p>
+            <a:r>
+              <a:rPr lang="hr-HR" sz="2200" b="1" dirty="0" err="1">
+                <a:solidFill>
+                  <a:schemeClr val="tx1"/>
+                </a:solidFill>
+              </a:rPr>
+              <a:t>SpikingSimpleCNN</a:t>
+            </a:r>
+            <a:r>
               <a:rPr lang="hr-HR" sz="2200" dirty="0">
                 <a:solidFill>
                   <a:schemeClr val="tx1"/>
                 </a:solidFill>
               </a:rPr>
-              <a:t>Odabrani modeli:</a:t>
+              <a:t>	</a:t>
             </a:r>
           </a:p>
           <a:p>
             <a:pPr lvl="1"/>
             <a:r>
-              <a:rPr lang="hr-HR" sz="1700" dirty="0" err="1">
-                <a:solidFill>
-                  <a:schemeClr val="tx1"/>
-                </a:solidFill>
-              </a:rPr>
-              <a:t>Spiking</a:t>
-            </a:r>
-            <a:r>
-              <a:rPr lang="hr-HR" sz="1700" dirty="0">
-                <a:solidFill>
-                  <a:schemeClr val="tx1"/>
-                </a:solidFill>
-              </a:rPr>
-              <a:t> </a:t>
-            </a:r>
-            <a:r>
-              <a:rPr lang="hr-HR" sz="1700" dirty="0" err="1">
-                <a:solidFill>
-                  <a:schemeClr val="tx1"/>
-                </a:solidFill>
-              </a:rPr>
-              <a:t>neural</a:t>
-            </a:r>
-            <a:r>
-              <a:rPr lang="hr-HR" sz="1700" dirty="0">
-                <a:solidFill>
-                  <a:schemeClr val="tx1"/>
-                </a:solidFill>
-              </a:rPr>
-              <a:t> </a:t>
-            </a:r>
-            <a:r>
-              <a:rPr lang="hr-HR" sz="1700" dirty="0" err="1">
-                <a:solidFill>
-                  <a:schemeClr val="tx1"/>
-                </a:solidFill>
-              </a:rPr>
-              <a:t>networks</a:t>
-            </a:r>
-            <a:r>
-              <a:rPr lang="hr-HR" sz="1700" dirty="0">
-                <a:solidFill>
-                  <a:schemeClr val="tx1"/>
-                </a:solidFill>
-              </a:rPr>
-              <a:t> – dvije arhitekture(</a:t>
-            </a:r>
-            <a:r>
-              <a:rPr lang="hr-HR" sz="1700" dirty="0" err="1">
-                <a:solidFill>
-                  <a:schemeClr val="tx1"/>
-                </a:solidFill>
-              </a:rPr>
-              <a:t>SpikingSimpleCNN</a:t>
-            </a:r>
-            <a:r>
-              <a:rPr lang="hr-HR" sz="1700" dirty="0">
-                <a:solidFill>
-                  <a:schemeClr val="tx1"/>
-                </a:solidFill>
-              </a:rPr>
-              <a:t> i </a:t>
-            </a:r>
-            <a:r>
-              <a:rPr lang="hr-HR" sz="1700" dirty="0" err="1">
+              <a:rPr lang="hr-HR" dirty="0">
+                <a:solidFill>
+                  <a:schemeClr val="tx1"/>
+                </a:solidFill>
+                <a:effectLst/>
+              </a:rPr>
+              <a:t>3 </a:t>
+            </a:r>
+            <a:r>
+              <a:rPr lang="hr-HR" dirty="0" err="1">
+                <a:solidFill>
+                  <a:schemeClr val="tx1"/>
+                </a:solidFill>
+                <a:effectLst/>
+              </a:rPr>
+              <a:t>konvolucijska</a:t>
+            </a:r>
+            <a:r>
+              <a:rPr lang="hr-HR" dirty="0">
+                <a:solidFill>
+                  <a:schemeClr val="tx1"/>
+                </a:solidFill>
+                <a:effectLst/>
+              </a:rPr>
+              <a:t> sloja</a:t>
+            </a:r>
+          </a:p>
+          <a:p>
+            <a:pPr lvl="1"/>
+            <a:r>
+              <a:rPr lang="hr-HR" dirty="0">
+                <a:solidFill>
+                  <a:schemeClr val="tx1"/>
+                </a:solidFill>
+                <a:effectLst/>
+              </a:rPr>
+              <a:t>Brz trening, dobra je referentna točka za provjeru osnovnog ponašanja </a:t>
+            </a:r>
+            <a:r>
+              <a:rPr lang="hr-HR" dirty="0" err="1">
+                <a:solidFill>
+                  <a:schemeClr val="tx1"/>
+                </a:solidFill>
+                <a:effectLst/>
+              </a:rPr>
+              <a:t>surrogate</a:t>
+            </a:r>
+            <a:r>
+              <a:rPr lang="hr-HR" dirty="0">
+                <a:solidFill>
+                  <a:schemeClr val="tx1"/>
+                </a:solidFill>
+                <a:effectLst/>
+              </a:rPr>
+              <a:t> pristupa</a:t>
+            </a:r>
+          </a:p>
+          <a:p>
+            <a:r>
+              <a:rPr lang="hr-HR" sz="2200" b="1" dirty="0" err="1">
                 <a:solidFill>
                   <a:schemeClr val="tx1"/>
                 </a:solidFill>
               </a:rPr>
               <a:t>SmallResNet</a:t>
             </a:r>
-            <a:r>
-              <a:rPr lang="hr-HR" sz="1700" dirty="0">
-                <a:solidFill>
-                  <a:schemeClr val="tx1"/>
-                </a:solidFill>
-              </a:rPr>
-              <a:t>)</a:t>
-            </a:r>
-            <a:r>
-              <a:rPr lang="hr-HR" dirty="0">
-                <a:solidFill>
-                  <a:schemeClr val="tx1"/>
-                </a:solidFill>
-              </a:rPr>
-              <a:t>	</a:t>
-            </a:r>
-          </a:p>
-          <a:p>
-            <a:r>
-              <a:rPr lang="hr-HR" dirty="0" err="1">
-                <a:solidFill>
-                  <a:schemeClr val="tx1"/>
-                </a:solidFill>
-              </a:rPr>
-              <a:t>Surrogate</a:t>
-            </a:r>
-            <a:r>
-              <a:rPr lang="hr-HR" dirty="0">
-                <a:solidFill>
-                  <a:schemeClr val="tx1"/>
-                </a:solidFill>
-              </a:rPr>
-              <a:t> </a:t>
-            </a:r>
-            <a:r>
-              <a:rPr lang="hr-HR" dirty="0" err="1">
-                <a:solidFill>
-                  <a:schemeClr val="tx1"/>
-                </a:solidFill>
-              </a:rPr>
-              <a:t>gradient</a:t>
-            </a:r>
-            <a:r>
-              <a:rPr lang="hr-HR" dirty="0">
-                <a:solidFill>
-                  <a:schemeClr val="tx1"/>
-                </a:solidFill>
-              </a:rPr>
-              <a:t> metode:</a:t>
-            </a:r>
-          </a:p>
-          <a:p>
-            <a:pPr lvl="1"/>
-            <a:r>
-              <a:rPr lang="hr-HR" sz="1700" dirty="0" err="1">
-                <a:solidFill>
-                  <a:schemeClr val="tx1"/>
-                </a:solidFill>
-              </a:rPr>
-              <a:t>AdaLi</a:t>
-            </a:r>
-            <a:endParaRPr lang="hr-HR" sz="1700" dirty="0">
+            <a:endParaRPr lang="hr-HR" sz="2200" b="1" dirty="0">
               <a:solidFill>
                 <a:schemeClr val="tx1"/>
               </a:solidFill>
@@ -8008,133 +8611,114 @@
           <a:p>
             <a:pPr lvl="1"/>
             <a:r>
-              <a:rPr lang="hr-HR" sz="1700" dirty="0" err="1">
-                <a:solidFill>
-                  <a:schemeClr val="tx1"/>
-                </a:solidFill>
-              </a:rPr>
-              <a:t>Sigmoid</a:t>
-            </a:r>
-            <a:endParaRPr lang="hr-HR" sz="1700" dirty="0">
+              <a:rPr lang="hr-HR" dirty="0">
+                <a:solidFill>
+                  <a:schemeClr val="tx1"/>
+                </a:solidFill>
+                <a:effectLst>
+                  <a:outerShdw blurRad="38100" dist="38100" dir="2700000" algn="tl">
+                    <a:srgbClr val="000000">
+                      <a:alpha val="43137"/>
+                    </a:srgbClr>
+                  </a:outerShdw>
+                </a:effectLst>
+              </a:rPr>
+              <a:t>svaki blok sadrži dvije </a:t>
+            </a:r>
+            <a:r>
+              <a:rPr lang="hr-HR" dirty="0" err="1">
+                <a:solidFill>
+                  <a:schemeClr val="tx1"/>
+                </a:solidFill>
+                <a:effectLst>
+                  <a:outerShdw blurRad="38100" dist="38100" dir="2700000" algn="tl">
+                    <a:srgbClr val="000000">
+                      <a:alpha val="43137"/>
+                    </a:srgbClr>
+                  </a:outerShdw>
+                </a:effectLst>
+              </a:rPr>
+              <a:t>konvolucije</a:t>
+            </a:r>
+            <a:endParaRPr lang="hr-HR" dirty="0">
+              <a:solidFill>
+                <a:schemeClr val="tx1"/>
+              </a:solidFill>
+              <a:effectLst>
+                <a:outerShdw blurRad="38100" dist="38100" dir="2700000" algn="tl">
+                  <a:srgbClr val="000000">
+                    <a:alpha val="43137"/>
+                  </a:srgbClr>
+                </a:outerShdw>
+              </a:effectLst>
+            </a:endParaRPr>
+          </a:p>
+          <a:p>
+            <a:pPr lvl="1"/>
+            <a:r>
+              <a:rPr lang="hr-HR" dirty="0">
+                <a:solidFill>
+                  <a:schemeClr val="tx1"/>
+                </a:solidFill>
+                <a:effectLst>
+                  <a:outerShdw blurRad="38100" dist="38100" dir="2700000" algn="tl">
+                    <a:srgbClr val="000000">
+                      <a:alpha val="43137"/>
+                    </a:srgbClr>
+                  </a:outerShdw>
+                </a:effectLst>
+              </a:rPr>
+              <a:t>Sporiji trening</a:t>
+            </a:r>
+          </a:p>
+          <a:p>
+            <a:pPr lvl="1"/>
+            <a:r>
+              <a:rPr lang="hr-HR" dirty="0">
+                <a:effectLst>
+                  <a:outerShdw blurRad="38100" dist="38100" dir="2700000" algn="tl">
+                    <a:srgbClr val="000000">
+                      <a:alpha val="43137"/>
+                    </a:srgbClr>
+                  </a:outerShdw>
+                </a:effectLst>
+              </a:rPr>
+              <a:t>provjera ponašanja </a:t>
+            </a:r>
+            <a:r>
+              <a:rPr lang="hr-HR" dirty="0" err="1">
+                <a:effectLst>
+                  <a:outerShdw blurRad="38100" dist="38100" dir="2700000" algn="tl">
+                    <a:srgbClr val="000000">
+                      <a:alpha val="43137"/>
+                    </a:srgbClr>
+                  </a:outerShdw>
+                </a:effectLst>
+              </a:rPr>
+              <a:t>surrogate</a:t>
+            </a:r>
+            <a:r>
+              <a:rPr lang="hr-HR" dirty="0">
+                <a:effectLst>
+                  <a:outerShdw blurRad="38100" dist="38100" dir="2700000" algn="tl">
+                    <a:srgbClr val="000000">
+                      <a:alpha val="43137"/>
+                    </a:srgbClr>
+                  </a:outerShdw>
+                </a:effectLst>
+              </a:rPr>
+              <a:t> pristupa u dubljoj mreži</a:t>
+            </a:r>
+          </a:p>
+          <a:p>
+            <a:pPr marL="450000" lvl="1" indent="0">
+              <a:buNone/>
+            </a:pPr>
+            <a:endParaRPr lang="hr-HR" dirty="0">
               <a:solidFill>
                 <a:schemeClr val="tx1"/>
               </a:solidFill>
             </a:endParaRPr>
-          </a:p>
-          <a:p>
-            <a:r>
-              <a:rPr lang="hr-HR" dirty="0">
-                <a:solidFill>
-                  <a:schemeClr val="tx1"/>
-                </a:solidFill>
-              </a:rPr>
-              <a:t>Strategije evaluacije:</a:t>
-            </a:r>
-          </a:p>
-          <a:p>
-            <a:pPr lvl="1"/>
-            <a:r>
-              <a:rPr lang="hr-HR" sz="1700" dirty="0">
-                <a:solidFill>
-                  <a:schemeClr val="tx1"/>
-                </a:solidFill>
-              </a:rPr>
-              <a:t>Više </a:t>
-            </a:r>
-            <a:r>
-              <a:rPr lang="hr-HR" sz="1700" dirty="0" err="1">
-                <a:solidFill>
-                  <a:schemeClr val="tx1"/>
-                </a:solidFill>
-              </a:rPr>
-              <a:t>seedova</a:t>
-            </a:r>
-            <a:r>
-              <a:rPr lang="hr-HR" sz="1700" dirty="0">
-                <a:solidFill>
-                  <a:schemeClr val="tx1"/>
-                </a:solidFill>
-              </a:rPr>
-              <a:t> za stabilniju usporedbu</a:t>
-            </a:r>
-          </a:p>
-          <a:p>
-            <a:pPr lvl="1"/>
-            <a:r>
-              <a:rPr lang="hr-HR" sz="1700" dirty="0">
-                <a:solidFill>
-                  <a:schemeClr val="tx1"/>
-                </a:solidFill>
-              </a:rPr>
-              <a:t>Jednaki uvjeti treniranja za sve </a:t>
-            </a:r>
-          </a:p>
-          <a:p>
-            <a:r>
-              <a:rPr lang="hr-HR" sz="2200" dirty="0">
-                <a:solidFill>
-                  <a:schemeClr val="tx1"/>
-                </a:solidFill>
-              </a:rPr>
-              <a:t>Metrike evaluacije:</a:t>
-            </a:r>
-          </a:p>
-          <a:p>
-            <a:pPr lvl="1"/>
-            <a:r>
-              <a:rPr lang="hr-HR" sz="1700" dirty="0" err="1">
-                <a:solidFill>
-                  <a:schemeClr val="tx1"/>
-                </a:solidFill>
-              </a:rPr>
-              <a:t>Accuracy</a:t>
-            </a:r>
-            <a:endParaRPr lang="hr-HR" sz="1700" dirty="0">
-              <a:solidFill>
-                <a:schemeClr val="tx1"/>
-              </a:solidFill>
-            </a:endParaRPr>
-          </a:p>
-          <a:p>
-            <a:pPr lvl="1"/>
-            <a:r>
-              <a:rPr lang="hr-HR" sz="1700" dirty="0" err="1">
-                <a:solidFill>
-                  <a:schemeClr val="tx1"/>
-                </a:solidFill>
-              </a:rPr>
-              <a:t>Loss</a:t>
-            </a:r>
-            <a:endParaRPr lang="hr-HR" sz="1700" dirty="0">
-              <a:solidFill>
-                <a:schemeClr val="tx1"/>
-              </a:solidFill>
-            </a:endParaRPr>
-          </a:p>
-          <a:p>
-            <a:pPr lvl="1"/>
-            <a:r>
-              <a:rPr lang="hr-HR" sz="1700" dirty="0">
-                <a:solidFill>
-                  <a:schemeClr val="tx1"/>
-                </a:solidFill>
-              </a:rPr>
-              <a:t>Stabilnost konvergencije</a:t>
-            </a:r>
-          </a:p>
-          <a:p>
-            <a:pPr lvl="1"/>
-            <a:r>
-              <a:rPr lang="hr-HR" sz="1700" dirty="0">
-                <a:solidFill>
-                  <a:schemeClr val="tx1"/>
-                </a:solidFill>
-              </a:rPr>
-              <a:t>Vrijeme treniranja</a:t>
-            </a:r>
-          </a:p>
-          <a:p>
-            <a:endParaRPr lang="hr-HR" dirty="0"/>
           </a:p>
         </p:txBody>
       </p:sp>
@@ -8170,10 +8754,10 @@
       </p:grpSpPr>
       <p:sp>
         <p:nvSpPr>
-          <p:cNvPr id="2" name="Naslov 1">
+          <p:cNvPr id="3" name="Rezervirano mjesto sadržaja 2">
             <a:extLst>
               <a:ext uri="{FF2B5EF4-FFF2-40B4-BE49-F238E27FC236}">
-                <a16:creationId xmlns:a16="http://schemas.microsoft.com/office/drawing/2014/main" id="{3AD33066-0C82-4227-BCDF-864CDCB02394}"/>
+                <a16:creationId xmlns:a16="http://schemas.microsoft.com/office/drawing/2014/main" id="{FFFBBCED-1C22-48EB-9C3D-E760240E1410}"/>
               </a:ext>
             </a:extLst>
           </p:cNvPr>
@@ -8181,227 +8765,242 @@
             <a:spLocks noGrp="1"/>
           </p:cNvSpPr>
           <p:nvPr>
-            <p:ph type="title"/>
-          </p:nvPr>
-        </p:nvSpPr>
-        <p:spPr/>
+            <p:ph idx="1"/>
+          </p:nvPr>
+        </p:nvSpPr>
+        <p:spPr>
+          <a:xfrm>
+            <a:off x="499621" y="424206"/>
+            <a:ext cx="11283884" cy="6052007"/>
+          </a:xfrm>
+        </p:spPr>
         <p:txBody>
           <a:bodyPr/>
           <a:lstStyle/>
           <a:p>
             <a:r>
+              <a:rPr lang="hr-HR" sz="2200" b="1" dirty="0" err="1">
+                <a:solidFill>
+                  <a:schemeClr val="tx1"/>
+                </a:solidFill>
+              </a:rPr>
+              <a:t>Surrogate</a:t>
+            </a:r>
+            <a:r>
+              <a:rPr lang="hr-HR" sz="2200" b="1" dirty="0">
+                <a:solidFill>
+                  <a:schemeClr val="tx1"/>
+                </a:solidFill>
+              </a:rPr>
+              <a:t> </a:t>
+            </a:r>
+            <a:r>
+              <a:rPr lang="hr-HR" sz="2200" b="1" dirty="0" err="1">
+                <a:solidFill>
+                  <a:schemeClr val="tx1"/>
+                </a:solidFill>
+              </a:rPr>
+              <a:t>gradient</a:t>
+            </a:r>
+            <a:r>
+              <a:rPr lang="hr-HR" sz="2200" b="1" dirty="0">
+                <a:solidFill>
+                  <a:schemeClr val="tx1"/>
+                </a:solidFill>
+              </a:rPr>
+              <a:t> metode:</a:t>
+            </a:r>
+          </a:p>
+          <a:p>
+            <a:pPr lvl="1"/>
+            <a:r>
+              <a:rPr lang="hr-HR" dirty="0" err="1">
+                <a:solidFill>
+                  <a:schemeClr val="tx1"/>
+                </a:solidFill>
+              </a:rPr>
+              <a:t>AdaLi</a:t>
+            </a:r>
+            <a:r>
               <a:rPr lang="hr-HR" dirty="0">
                 <a:solidFill>
                   <a:schemeClr val="tx1"/>
                 </a:solidFill>
               </a:rPr>
-              <a:t>Dosadašnji napredak i preliminarni rezultati</a:t>
-            </a:r>
-          </a:p>
-        </p:txBody>
-      </p:sp>
-      <p:sp>
-        <p:nvSpPr>
-          <p:cNvPr id="3" name="Rezervirano mjesto sadržaja 2">
-            <a:extLst>
-              <a:ext uri="{FF2B5EF4-FFF2-40B4-BE49-F238E27FC236}">
-                <a16:creationId xmlns:a16="http://schemas.microsoft.com/office/drawing/2014/main" id="{6C2DBBA8-EC39-4920-B12C-F4A707F270BA}"/>
-              </a:ext>
-            </a:extLst>
-          </p:cNvPr>
-          <p:cNvSpPr>
-            <a:spLocks noGrp="1"/>
-          </p:cNvSpPr>
-          <p:nvPr>
-            <p:ph idx="1"/>
-          </p:nvPr>
-        </p:nvSpPr>
-        <p:spPr>
-          <a:xfrm>
-            <a:off x="141402" y="1732449"/>
-            <a:ext cx="11764652" cy="4668351"/>
-          </a:xfrm>
-        </p:spPr>
-        <p:txBody>
-          <a:bodyPr>
-            <a:normAutofit/>
-          </a:bodyPr>
-          <a:lstStyle/>
-          <a:p>
-            <a:r>
-              <a:rPr lang="hr-HR" sz="2400" dirty="0">
-                <a:solidFill>
-                  <a:schemeClr val="tx1"/>
-                </a:solidFill>
-              </a:rPr>
-              <a:t>Implementirane </a:t>
-            </a:r>
-            <a:r>
-              <a:rPr lang="hr-HR" sz="2400" dirty="0" err="1">
-                <a:solidFill>
-                  <a:schemeClr val="tx1"/>
-                </a:solidFill>
-              </a:rPr>
-              <a:t>obe</a:t>
-            </a:r>
-            <a:r>
-              <a:rPr lang="hr-HR" sz="2400" dirty="0">
-                <a:solidFill>
-                  <a:schemeClr val="tx1"/>
-                </a:solidFill>
-              </a:rPr>
-              <a:t> SNN arhitekture i </a:t>
-            </a:r>
-            <a:r>
-              <a:rPr lang="hr-HR" sz="2400" dirty="0" err="1">
-                <a:solidFill>
-                  <a:schemeClr val="tx1"/>
-                </a:solidFill>
-              </a:rPr>
-              <a:t>surrogate</a:t>
-            </a:r>
-            <a:r>
-              <a:rPr lang="hr-HR" sz="2400" dirty="0">
-                <a:solidFill>
-                  <a:schemeClr val="tx1"/>
-                </a:solidFill>
-              </a:rPr>
-              <a:t> </a:t>
-            </a:r>
-            <a:r>
-              <a:rPr lang="hr-HR" sz="2400" dirty="0" err="1">
-                <a:solidFill>
-                  <a:schemeClr val="tx1"/>
-                </a:solidFill>
-              </a:rPr>
-              <a:t>gradient</a:t>
-            </a:r>
-            <a:r>
-              <a:rPr lang="hr-HR" sz="2400" dirty="0">
-                <a:solidFill>
-                  <a:schemeClr val="tx1"/>
-                </a:solidFill>
-              </a:rPr>
-              <a:t> metode</a:t>
-            </a:r>
-          </a:p>
-          <a:p>
-            <a:r>
-              <a:rPr lang="hr-HR" sz="2400" dirty="0">
-                <a:solidFill>
-                  <a:schemeClr val="tx1"/>
-                </a:solidFill>
-              </a:rPr>
-              <a:t>Provedeni eksperimenti na MNIST, CIFAR10 i CIFAR100</a:t>
-            </a:r>
-          </a:p>
-          <a:p>
-            <a:r>
-              <a:rPr lang="hr-HR" sz="2400" dirty="0">
-                <a:solidFill>
-                  <a:schemeClr val="tx1"/>
-                </a:solidFill>
-              </a:rPr>
-              <a:t>Rezultati:</a:t>
-            </a:r>
-          </a:p>
-          <a:p>
-            <a:pPr lvl="1"/>
-            <a:r>
-              <a:rPr lang="hr-HR" sz="2000" dirty="0" err="1">
-                <a:solidFill>
-                  <a:schemeClr val="tx1"/>
-                </a:solidFill>
-              </a:rPr>
-              <a:t>AdaLi</a:t>
-            </a:r>
-            <a:r>
-              <a:rPr lang="hr-HR" sz="2000" dirty="0">
-                <a:solidFill>
-                  <a:schemeClr val="tx1"/>
-                </a:solidFill>
-              </a:rPr>
-              <a:t> postiže bolje rezultate na svim eksperimentima</a:t>
-            </a:r>
-          </a:p>
-          <a:p>
-            <a:pPr lvl="1"/>
-            <a:r>
-              <a:rPr lang="hr-HR" sz="2000" dirty="0">
-                <a:solidFill>
-                  <a:schemeClr val="tx1"/>
-                </a:solidFill>
-              </a:rPr>
-              <a:t>Veća razlika na složenijim </a:t>
-            </a:r>
-            <a:r>
-              <a:rPr lang="hr-HR" sz="2000" dirty="0" err="1">
-                <a:solidFill>
-                  <a:schemeClr val="tx1"/>
-                </a:solidFill>
-              </a:rPr>
-              <a:t>datasetima</a:t>
-            </a:r>
-            <a:endParaRPr lang="hr-HR" sz="2000" dirty="0">
+              <a:t> - </a:t>
+            </a:r>
+            <a:r>
+              <a:rPr lang="hr-HR" dirty="0">
+                <a:solidFill>
+                  <a:schemeClr val="tx1"/>
+                </a:solidFill>
+                <a:effectLst/>
+              </a:rPr>
+              <a:t>prilagodljiva funkcija s parametrima koji mijenjaju oblik gradijenta u blizini praga</a:t>
+            </a:r>
+            <a:endParaRPr lang="hr-HR" dirty="0">
               <a:solidFill>
                 <a:schemeClr val="tx1"/>
               </a:solidFill>
             </a:endParaRPr>
           </a:p>
           <a:p>
-            <a:r>
-              <a:rPr lang="hr-HR" sz="2400" dirty="0">
-                <a:solidFill>
-                  <a:schemeClr val="tx1"/>
-                </a:solidFill>
-              </a:rPr>
-              <a:t>Problemi:</a:t>
-            </a:r>
-          </a:p>
-          <a:p>
             <a:pPr lvl="1"/>
             <a:r>
-              <a:rPr lang="hr-HR" sz="2000" dirty="0">
-                <a:solidFill>
-                  <a:schemeClr val="tx1"/>
-                </a:solidFill>
-              </a:rPr>
-              <a:t>Dulje vrijeme treniranja</a:t>
+              <a:rPr lang="hr-HR" dirty="0" err="1">
+                <a:solidFill>
+                  <a:schemeClr val="tx1"/>
+                </a:solidFill>
+              </a:rPr>
+              <a:t>Sigmoid</a:t>
+            </a:r>
+            <a:r>
+              <a:rPr lang="hr-HR" dirty="0">
+                <a:solidFill>
+                  <a:schemeClr val="tx1"/>
+                </a:solidFill>
+              </a:rPr>
+              <a:t> - </a:t>
+            </a:r>
+            <a:r>
+              <a:rPr lang="hr-HR" dirty="0">
+                <a:solidFill>
+                  <a:schemeClr val="tx1"/>
+                </a:solidFill>
+                <a:effectLst/>
+              </a:rPr>
+              <a:t>glatka središnja funkcija</a:t>
+            </a:r>
+            <a:endParaRPr lang="hr-HR" dirty="0">
+              <a:solidFill>
+                <a:schemeClr val="tx1"/>
+              </a:solidFill>
+            </a:endParaRPr>
+          </a:p>
+          <a:p>
+            <a:r>
+              <a:rPr lang="hr-HR" sz="2200" b="1" dirty="0">
+                <a:solidFill>
+                  <a:schemeClr val="tx1"/>
+                </a:solidFill>
+              </a:rPr>
+              <a:t>Strategije evaluacije:</a:t>
             </a:r>
           </a:p>
           <a:p>
             <a:pPr lvl="1"/>
             <a:r>
-              <a:rPr lang="hr-HR" sz="2000" dirty="0">
-                <a:solidFill>
-                  <a:schemeClr val="tx1"/>
-                </a:solidFill>
-              </a:rPr>
-              <a:t>Problemi kompatibilnosti </a:t>
-            </a:r>
-            <a:r>
-              <a:rPr lang="hr-HR" sz="2000" dirty="0" err="1">
-                <a:solidFill>
-                  <a:schemeClr val="tx1"/>
-                </a:solidFill>
-              </a:rPr>
-              <a:t>PyTorcha</a:t>
-            </a:r>
-            <a:r>
-              <a:rPr lang="hr-HR" sz="2000" dirty="0">
-                <a:solidFill>
-                  <a:schemeClr val="tx1"/>
-                </a:solidFill>
-              </a:rPr>
-              <a:t> i NVIDIA drivera</a:t>
-            </a:r>
+              <a:rPr lang="hr-HR" dirty="0">
+                <a:solidFill>
+                  <a:schemeClr val="tx1"/>
+                </a:solidFill>
+              </a:rPr>
+              <a:t>Više </a:t>
+            </a:r>
+            <a:r>
+              <a:rPr lang="hr-HR" dirty="0" err="1">
+                <a:solidFill>
+                  <a:schemeClr val="tx1"/>
+                </a:solidFill>
+              </a:rPr>
+              <a:t>seedova</a:t>
+            </a:r>
+            <a:r>
+              <a:rPr lang="hr-HR" dirty="0">
+                <a:solidFill>
+                  <a:schemeClr val="tx1"/>
+                </a:solidFill>
+              </a:rPr>
+              <a:t> za stabilniju usporedbu</a:t>
+            </a:r>
+          </a:p>
+          <a:p>
+            <a:pPr lvl="1"/>
+            <a:r>
+              <a:rPr lang="hr-HR" dirty="0">
+                <a:solidFill>
+                  <a:schemeClr val="tx1"/>
+                </a:solidFill>
+              </a:rPr>
+              <a:t>Jednaki uvjeti treniranja za sve </a:t>
+            </a:r>
+          </a:p>
+          <a:p>
+            <a:r>
+              <a:rPr lang="hr-HR" sz="2200" b="1" dirty="0">
+                <a:solidFill>
+                  <a:schemeClr val="tx1"/>
+                </a:solidFill>
+              </a:rPr>
+              <a:t>Metrike evaluacije:</a:t>
+            </a:r>
+          </a:p>
+          <a:p>
+            <a:pPr lvl="1"/>
+            <a:r>
+              <a:rPr lang="hr-HR" dirty="0" err="1">
+                <a:solidFill>
+                  <a:schemeClr val="tx1"/>
+                </a:solidFill>
+              </a:rPr>
+              <a:t>Accuracy</a:t>
+            </a:r>
+            <a:endParaRPr lang="hr-HR" dirty="0">
+              <a:solidFill>
+                <a:schemeClr val="tx1"/>
+              </a:solidFill>
+            </a:endParaRPr>
+          </a:p>
+          <a:p>
+            <a:pPr lvl="1"/>
+            <a:r>
+              <a:rPr lang="hr-HR" dirty="0" err="1">
+                <a:solidFill>
+                  <a:schemeClr val="tx1"/>
+                </a:solidFill>
+              </a:rPr>
+              <a:t>Loss</a:t>
+            </a:r>
+            <a:endParaRPr lang="hr-HR" dirty="0">
+              <a:solidFill>
+                <a:schemeClr val="tx1"/>
+              </a:solidFill>
+            </a:endParaRPr>
+          </a:p>
+          <a:p>
+            <a:pPr lvl="1"/>
+            <a:r>
+              <a:rPr lang="hr-HR" dirty="0">
+                <a:solidFill>
+                  <a:schemeClr val="tx1"/>
+                </a:solidFill>
+              </a:rPr>
+              <a:t>Stabilnost konvergencije</a:t>
+            </a:r>
+          </a:p>
+          <a:p>
+            <a:pPr lvl="1"/>
+            <a:r>
+              <a:rPr lang="hr-HR" dirty="0">
+                <a:solidFill>
+                  <a:schemeClr val="tx1"/>
+                </a:solidFill>
+              </a:rPr>
+              <a:t>Vrijeme treniranja</a:t>
+            </a:r>
+          </a:p>
+          <a:p>
+            <a:pPr marL="36900" indent="0">
+              <a:buNone/>
+            </a:pPr>
+            <a:endParaRPr lang="hr-HR" dirty="0"/>
           </a:p>
         </p:txBody>
       </p:sp>
     </p:spTree>
     <p:extLst>
       <p:ext uri="{BB962C8B-B14F-4D97-AF65-F5344CB8AC3E}">
-        <p14:creationId xmlns:p14="http://schemas.microsoft.com/office/powerpoint/2010/main" val="1306761088"/>
+        <p14:creationId xmlns:p14="http://schemas.microsoft.com/office/powerpoint/2010/main" val="1226826780"/>
       </p:ext>
     </p:extLst>
   </p:cSld>
@@ -8433,7 +9032,7 @@
           <p:cNvPr id="2" name="Naslov 1">
             <a:extLst>
               <a:ext uri="{FF2B5EF4-FFF2-40B4-BE49-F238E27FC236}">
-                <a16:creationId xmlns:a16="http://schemas.microsoft.com/office/drawing/2014/main" id="{A9CB856E-9D5B-4331-84FF-31D392F1D83D}"/>
+                <a16:creationId xmlns:a16="http://schemas.microsoft.com/office/drawing/2014/main" id="{3AD33066-0C82-4227-BCDF-864CDCB02394}"/>
               </a:ext>
             </a:extLst>
           </p:cNvPr>
@@ -8449,49 +9048,308 @@
           <a:bodyPr/>
           <a:lstStyle/>
           <a:p>
-            <a:endParaRPr lang="hr-HR"/>
-          </a:p>
-        </p:txBody>
-      </p:sp>
-      <p:pic>
-        <p:nvPicPr>
-          <p:cNvPr id="5" name="Rezervirano mjesto sadržaja 4">
+            <a:r>
+              <a:rPr lang="hr-HR" dirty="0">
+                <a:solidFill>
+                  <a:schemeClr val="tx1"/>
+                </a:solidFill>
+              </a:rPr>
+              <a:t>Rezultati i problemi</a:t>
+            </a:r>
+          </a:p>
+        </p:txBody>
+      </p:sp>
+      <p:sp>
+        <p:nvSpPr>
+          <p:cNvPr id="3" name="Rezervirano mjesto sadržaja 2">
             <a:extLst>
               <a:ext uri="{FF2B5EF4-FFF2-40B4-BE49-F238E27FC236}">
-                <a16:creationId xmlns:a16="http://schemas.microsoft.com/office/drawing/2014/main" id="{E8DAA826-AAAE-4522-9203-6EF596AD6FA9}"/>
+                <a16:creationId xmlns:a16="http://schemas.microsoft.com/office/drawing/2014/main" id="{6C2DBBA8-EC39-4920-B12C-F4A707F270BA}"/>
               </a:ext>
             </a:extLst>
           </p:cNvPr>
-          <p:cNvPicPr>
-            <a:picLocks noGrp="1" noChangeAspect="1"/>
-          </p:cNvPicPr>
+          <p:cNvSpPr>
+            <a:spLocks noGrp="1"/>
+          </p:cNvSpPr>
           <p:nvPr>
             <p:ph idx="1"/>
           </p:nvPr>
-        </p:nvPicPr>
-        <p:blipFill>
-          <a:blip r:embed="rId2">
-            <a:extLst>
-              <a:ext uri="{28A0092B-C50C-407E-A947-70E740481C1C}">
-                <a14:useLocalDpi xmlns:a14="http://schemas.microsoft.com/office/drawing/2010/main" val="0"/>
-              </a:ext>
-            </a:extLst>
-          </a:blip>
-          <a:stretch>
-            <a:fillRect/>
-          </a:stretch>
-        </p:blipFill>
+        </p:nvSpPr>
         <p:spPr>
           <a:xfrm>
-            <a:off x="711373" y="1216058"/>
-            <a:ext cx="10758605" cy="4713401"/>
+            <a:off x="141402" y="1732449"/>
+            <a:ext cx="11764652" cy="4668351"/>
           </a:xfrm>
         </p:spPr>
-      </p:pic>
+        <p:txBody>
+          <a:bodyPr>
+            <a:normAutofit/>
+          </a:bodyPr>
+          <a:lstStyle/>
+          <a:p>
+            <a:r>
+              <a:rPr lang="hr-HR" sz="2200" b="1" dirty="0">
+                <a:solidFill>
+                  <a:schemeClr val="tx1"/>
+                </a:solidFill>
+              </a:rPr>
+              <a:t>Implementirane </a:t>
+            </a:r>
+            <a:r>
+              <a:rPr lang="hr-HR" sz="2200" b="1" dirty="0" err="1">
+                <a:solidFill>
+                  <a:schemeClr val="tx1"/>
+                </a:solidFill>
+              </a:rPr>
+              <a:t>obe</a:t>
+            </a:r>
+            <a:r>
+              <a:rPr lang="hr-HR" sz="2200" b="1" dirty="0">
+                <a:solidFill>
+                  <a:schemeClr val="tx1"/>
+                </a:solidFill>
+              </a:rPr>
+              <a:t> SNN arhitekture i </a:t>
+            </a:r>
+            <a:r>
+              <a:rPr lang="hr-HR" sz="2200" b="1" dirty="0" err="1">
+                <a:solidFill>
+                  <a:schemeClr val="tx1"/>
+                </a:solidFill>
+              </a:rPr>
+              <a:t>surrogate</a:t>
+            </a:r>
+            <a:r>
+              <a:rPr lang="hr-HR" sz="2200" b="1" dirty="0">
+                <a:solidFill>
+                  <a:schemeClr val="tx1"/>
+                </a:solidFill>
+              </a:rPr>
+              <a:t> </a:t>
+            </a:r>
+            <a:r>
+              <a:rPr lang="hr-HR" sz="2200" b="1" dirty="0" err="1">
+                <a:solidFill>
+                  <a:schemeClr val="tx1"/>
+                </a:solidFill>
+              </a:rPr>
+              <a:t>gradient</a:t>
+            </a:r>
+            <a:r>
+              <a:rPr lang="hr-HR" sz="2200" b="1" dirty="0">
+                <a:solidFill>
+                  <a:schemeClr val="tx1"/>
+                </a:solidFill>
+              </a:rPr>
+              <a:t> metode</a:t>
+            </a:r>
+          </a:p>
+          <a:p>
+            <a:r>
+              <a:rPr lang="hr-HR" sz="2200" b="1" dirty="0">
+                <a:solidFill>
+                  <a:schemeClr val="tx1"/>
+                </a:solidFill>
+              </a:rPr>
+              <a:t>Provedeni eksperimenti na MNIST, CIFAR10 i CIFAR100</a:t>
+            </a:r>
+          </a:p>
+          <a:p>
+            <a:r>
+              <a:rPr lang="hr-HR" sz="2200" b="1" dirty="0">
+                <a:solidFill>
+                  <a:schemeClr val="tx1"/>
+                </a:solidFill>
+              </a:rPr>
+              <a:t>Rezultati:</a:t>
+            </a:r>
+          </a:p>
+          <a:p>
+            <a:pPr lvl="1"/>
+            <a:r>
+              <a:rPr lang="hr-HR" dirty="0" err="1">
+                <a:solidFill>
+                  <a:schemeClr val="tx1"/>
+                </a:solidFill>
+                <a:effectLst/>
+              </a:rPr>
+              <a:t>AdaLi</a:t>
+            </a:r>
+            <a:r>
+              <a:rPr lang="hr-HR" dirty="0">
+                <a:solidFill>
+                  <a:schemeClr val="tx1"/>
+                </a:solidFill>
+                <a:effectLst/>
+              </a:rPr>
+              <a:t> daje konzistentno bolji omjer točnosti i energetske učinkovitosti u smislu niže prosječne </a:t>
+            </a:r>
+            <a:r>
+              <a:rPr lang="hr-HR" dirty="0" err="1">
+                <a:solidFill>
+                  <a:schemeClr val="tx1"/>
+                </a:solidFill>
+                <a:effectLst/>
+              </a:rPr>
+              <a:t>spike</a:t>
+            </a:r>
+            <a:r>
+              <a:rPr lang="hr-HR" dirty="0">
+                <a:solidFill>
+                  <a:schemeClr val="tx1"/>
+                </a:solidFill>
+                <a:effectLst/>
+              </a:rPr>
+              <a:t> aktivnosti na svim </a:t>
+            </a:r>
+            <a:r>
+              <a:rPr lang="hr-HR" dirty="0" err="1">
+                <a:solidFill>
+                  <a:schemeClr val="tx1"/>
+                </a:solidFill>
+                <a:effectLst/>
+              </a:rPr>
+              <a:t>datasetovima</a:t>
+            </a:r>
+            <a:endParaRPr lang="hr-HR" dirty="0">
+              <a:solidFill>
+                <a:schemeClr val="tx1"/>
+              </a:solidFill>
+              <a:effectLst/>
+            </a:endParaRPr>
+          </a:p>
+          <a:p>
+            <a:pPr lvl="1"/>
+            <a:r>
+              <a:rPr lang="hr-HR" dirty="0" err="1">
+                <a:solidFill>
+                  <a:schemeClr val="tx1"/>
+                </a:solidFill>
+                <a:effectLst/>
+              </a:rPr>
+              <a:t>AdaLi</a:t>
+            </a:r>
+            <a:r>
+              <a:rPr lang="hr-HR" dirty="0">
+                <a:solidFill>
+                  <a:schemeClr val="tx1"/>
+                </a:solidFill>
+                <a:effectLst/>
+              </a:rPr>
+              <a:t> daje konzistentno bolji omjer točnosti i energetske učinkovitosti u smislu niže prosječne </a:t>
+            </a:r>
+            <a:r>
+              <a:rPr lang="hr-HR" dirty="0" err="1">
+                <a:solidFill>
+                  <a:schemeClr val="tx1"/>
+                </a:solidFill>
+                <a:effectLst/>
+              </a:rPr>
+              <a:t>spike</a:t>
+            </a:r>
+            <a:r>
+              <a:rPr lang="hr-HR" dirty="0">
+                <a:solidFill>
+                  <a:schemeClr val="tx1"/>
+                </a:solidFill>
+                <a:effectLst/>
+              </a:rPr>
+              <a:t> aktivnosti.</a:t>
+            </a:r>
+          </a:p>
+          <a:p>
+            <a:pPr lvl="1"/>
+            <a:r>
+              <a:rPr lang="hr-HR" dirty="0" err="1">
+                <a:solidFill>
+                  <a:schemeClr val="tx1"/>
+                </a:solidFill>
+                <a:effectLst/>
+              </a:rPr>
+              <a:t>AdaLi</a:t>
+            </a:r>
+            <a:r>
+              <a:rPr lang="hr-HR" dirty="0">
+                <a:solidFill>
+                  <a:schemeClr val="tx1"/>
+                </a:solidFill>
+                <a:effectLst/>
+              </a:rPr>
+              <a:t> ima dulje vrijeme treniranja(5 do 15 posto ovisno o </a:t>
+            </a:r>
+            <a:r>
+              <a:rPr lang="hr-HR" dirty="0" err="1">
+                <a:solidFill>
+                  <a:schemeClr val="tx1"/>
+                </a:solidFill>
+                <a:effectLst/>
+              </a:rPr>
+              <a:t>datasetu</a:t>
+            </a:r>
+            <a:r>
+              <a:rPr lang="hr-HR" dirty="0">
+                <a:solidFill>
+                  <a:schemeClr val="tx1"/>
+                </a:solidFill>
+                <a:effectLst/>
+              </a:rPr>
+              <a:t> i arhitekturi)</a:t>
+            </a:r>
+          </a:p>
+          <a:p>
+            <a:r>
+              <a:rPr lang="hr-HR" sz="2200" b="1" dirty="0">
+                <a:solidFill>
+                  <a:schemeClr val="tx1"/>
+                </a:solidFill>
+              </a:rPr>
+              <a:t>Problemi:</a:t>
+            </a:r>
+          </a:p>
+          <a:p>
+            <a:pPr lvl="1"/>
+            <a:r>
+              <a:rPr lang="hr-HR" dirty="0">
+                <a:solidFill>
+                  <a:schemeClr val="tx1"/>
+                </a:solidFill>
+              </a:rPr>
+              <a:t>Dulje vrijeme treniranja</a:t>
+            </a:r>
+          </a:p>
+          <a:p>
+            <a:pPr lvl="1"/>
+            <a:r>
+              <a:rPr lang="hr-HR" dirty="0">
+                <a:solidFill>
+                  <a:schemeClr val="tx1"/>
+                </a:solidFill>
+              </a:rPr>
+              <a:t>Problemi kompatibilnosti </a:t>
+            </a:r>
+            <a:r>
+              <a:rPr lang="hr-HR" dirty="0" err="1">
+                <a:solidFill>
+                  <a:schemeClr val="tx1"/>
+                </a:solidFill>
+              </a:rPr>
+              <a:t>PyTorcha</a:t>
+            </a:r>
+            <a:r>
+              <a:rPr lang="hr-HR" dirty="0">
+                <a:solidFill>
+                  <a:schemeClr val="tx1"/>
+                </a:solidFill>
+              </a:rPr>
+              <a:t> i NVIDIA drivera</a:t>
+            </a:r>
+          </a:p>
+        </p:txBody>
+      </p:sp>
     </p:spTree>
     <p:extLst>
       <p:ext uri="{BB962C8B-B14F-4D97-AF65-F5344CB8AC3E}">
-        <p14:creationId xmlns:p14="http://schemas.microsoft.com/office/powerpoint/2010/main" val="4189312054"/>
+        <p14:creationId xmlns:p14="http://schemas.microsoft.com/office/powerpoint/2010/main" val="1306761088"/>
       </p:ext>
     </p:extLst>
   </p:cSld>
